--- a/presentations/NS_L01_ThreatMap_Lesson.pptx
+++ b/presentations/NS_L01_ThreatMap_Lesson.pptx
@@ -19,9 +19,10 @@
     <p:sldId id="267" r:id="rId13"/>
     <p:sldId id="268" r:id="rId14"/>
     <p:sldId id="269" r:id="rId15"/>
+    <p:sldId id="270" r:id="rId16"/>
   </p:sldIdLst>
   <p:notesMasterIdLst>
-    <p:notesMasterId r:id="rId16"/>
+    <p:notesMasterId r:id="rId17"/>
   </p:notesMasterIdLst>
   <p:sldSz cx="12192000" cy="6858000"/>
   <p:notesSz cx="6858000" cy="12192000"/>
@@ -692,7 +693,13 @@
           <a:p>
             <a:r>
               <a:rPr lang="en-US" dirty="0"/>
-              <a:t>Make them commit to an answer on paper before they tap the star. Guessing first costs them the learning.</a:t>
+              <a:t>The answer is C: Ransomware.
+Do not say it yet. Every pupil commits first - fingers, whiteboards or a show of hands on each letter in turn - and you count the split before anyone can change their mind.
+IF MOST OF THE CLASS IS RIGHT: say why it is right in one sentence and go straight on to the independent work.
+IF A SIGNIFICANT GROUP IS ON ONE WRONG LETTER: that option is the misconception to teach against before anyone goes on. Go back to station 4, CryptoLocker, and work through its example again, aloud, with the class watching, then re-ask this question.
+The course's own response to a wrong answer here: It encrypted files and demanded payment for the key.
+A limitation, stated rather than papered over: one response covers every wrong option; it does not say what to revisit for each one. The course does not record what each separate wrong option means, and this slide does not invent it. Decide your own reteach for each option before the lesson; the options above are the start of it.
+This is a real activity from the experience (ns-l01-s4-c1), so the wording here is the wording a pupil will see.</a:t>
             </a:r>
             <a:endParaRPr lang="en-US" dirty="0"/>
           </a:p>
@@ -780,7 +787,7 @@
           <a:p>
             <a:r>
               <a:rPr lang="en-US" dirty="0"/>
-              <a:t>Use these as a settler, or as something for early finishers to read in the experience.</a:t>
+              <a:t>Make them commit to an answer on paper before they tap the star. Guessing first costs them the learning.</a:t>
             </a:r>
             <a:endParaRPr lang="en-US" dirty="0"/>
           </a:p>
@@ -868,7 +875,7 @@
           <a:p>
             <a:r>
               <a:rPr lang="en-US" dirty="0"/>
-              <a:t>Timed and silent. Mark against the answer sheet, then ask students to record their weakest area.</a:t>
+              <a:t>Use these as a settler, or as something for early finishers to read in the experience.</a:t>
             </a:r>
             <a:endParaRPr lang="en-US" dirty="0"/>
           </a:p>
@@ -956,7 +963,7 @@
           <a:p>
             <a:r>
               <a:rPr lang="en-US" dirty="0"/>
-              <a:t>Students copy their score-screen breakdown onto the worksheet, then rate themselves here.</a:t>
+              <a:t>Timed and silent. Mark against the answer sheet, then ask students to record their weakest area.</a:t>
             </a:r>
             <a:endParaRPr lang="en-US" dirty="0"/>
           </a:p>
@@ -980,6 +987,94 @@
             <a:fld id="{F7021451-1387-4CA6-816F-3879F97B5CBC}" type="slidenum">
               <a:rPr lang="en-US"/>
               <a:t>14</a:t>
+            </a:fld>
+            <a:endParaRPr lang="en-US"/>
+          </a:p>
+        </p:txBody>
+      </p:sp>
+    </p:spTree>
+    <p:extLst>
+      <p:ext uri="{BB962C8B-B14F-4D97-AF65-F5344CB8AC3E}">
+        <p14:creationId xmlns:p14="http://schemas.microsoft.com/office/powerpoint/2010/main" val="1024086991"/>
+      </p:ext>
+    </p:extLst>
+  </p:cSld>
+  <p:clrMapOvr>
+    <a:masterClrMapping/>
+  </p:clrMapOvr>
+</p:notes>
+</file>
+
+<file path=ppt/notesSlides/notesSlide15.xml><?xml version="1.0" encoding="utf-8"?>
+<p:notes xmlns:a="http://schemas.openxmlformats.org/drawingml/2006/main" xmlns:r="http://schemas.openxmlformats.org/officeDocument/2006/relationships" xmlns:p="http://schemas.openxmlformats.org/presentationml/2006/main">
+  <p:cSld>
+    <p:spTree>
+      <p:nvGrpSpPr>
+        <p:cNvPr id="1" name=""/>
+        <p:cNvGrpSpPr/>
+        <p:nvPr/>
+      </p:nvGrpSpPr>
+      <p:grpSpPr>
+        <a:xfrm>
+          <a:off x="0" y="0"/>
+          <a:ext cx="0" cy="0"/>
+          <a:chOff x="0" y="0"/>
+          <a:chExt cx="0" cy="0"/>
+        </a:xfrm>
+      </p:grpSpPr>
+      <p:sp>
+        <p:nvSpPr>
+          <p:cNvPr id="2" name="Slide Image Placeholder 1"/>
+          <p:cNvSpPr>
+            <a:spLocks noGrp="1" noRot="1" noChangeAspect="1"/>
+          </p:cNvSpPr>
+          <p:nvPr>
+            <p:ph type="sldImg"/>
+          </p:nvPr>
+        </p:nvSpPr>
+        <p:spPr/>
+      </p:sp>
+      <p:sp>
+        <p:nvSpPr>
+          <p:cNvPr id="3" name="Notes Placeholder 2"/>
+          <p:cNvSpPr>
+            <a:spLocks noGrp="1"/>
+          </p:cNvSpPr>
+          <p:nvPr>
+            <p:ph type="body" idx="1"/>
+          </p:nvPr>
+        </p:nvSpPr>
+        <p:spPr/>
+        <p:txBody>
+          <a:bodyPr/>
+          <a:lstStyle/>
+          <a:p>
+            <a:r>
+              <a:rPr lang="en-US" dirty="0"/>
+              <a:t>Students copy their score-screen breakdown onto the worksheet, then rate themselves here.</a:t>
+            </a:r>
+            <a:endParaRPr lang="en-US" dirty="0"/>
+          </a:p>
+        </p:txBody>
+      </p:sp>
+      <p:sp>
+        <p:nvSpPr>
+          <p:cNvPr id="4" name="Slide Number Placeholder 3"/>
+          <p:cNvSpPr>
+            <a:spLocks noGrp="1"/>
+          </p:cNvSpPr>
+          <p:nvPr>
+            <p:ph type="sldNum" sz="quarter" idx="10"/>
+          </p:nvPr>
+        </p:nvSpPr>
+        <p:spPr/>
+        <p:txBody>
+          <a:bodyPr/>
+          <a:lstStyle/>
+          <a:p>
+            <a:fld id="{F7021451-1387-4CA6-816F-3879F97B5CBC}" type="slidenum">
+              <a:rPr lang="en-US"/>
+              <a:t>15</a:t>
             </a:fld>
             <a:endParaRPr lang="en-US"/>
           </a:p>
@@ -2949,12 +3044,12 @@
         </p:nvSpPr>
         <p:spPr>
           <a:xfrm>
-            <a:off x="502920" y="438912"/>
-            <a:ext cx="3108960" cy="502920"/>
+            <a:off x="502920" y="457200"/>
+            <a:ext cx="1051560" cy="420624"/>
           </a:xfrm>
           <a:prstGeom prst="roundRect">
             <a:avLst>
-              <a:gd name="adj" fmla="val 18182"/>
+              <a:gd name="adj" fmla="val 21739"/>
             </a:avLst>
           </a:prstGeom>
           <a:solidFill>
@@ -2971,8 +3066,8 @@
         </p:nvSpPr>
         <p:spPr>
           <a:xfrm>
-            <a:off x="502920" y="438912"/>
-            <a:ext cx="3108960" cy="502920"/>
+            <a:off x="502920" y="457200"/>
+            <a:ext cx="1051560" cy="420624"/>
           </a:xfrm>
           <a:prstGeom prst="rect">
             <a:avLst/>
@@ -2988,7 +3083,7 @@
               <a:buNone/>
             </a:pPr>
             <a:r>
-              <a:rPr lang="en-US" sz="1300" b="1" dirty="0">
+              <a:rPr lang="en-US" sz="1200" b="1" dirty="0">
                 <a:solidFill>
                   <a:srgbClr val="101828"/>
                 </a:solidFill>
@@ -2996,9 +3091,9 @@
                 <a:ea typeface="IBM Plex Mono" pitchFamily="34" charset="-122"/>
                 <a:cs typeface="IBM Plex Mono" pitchFamily="34" charset="-120"/>
               </a:rPr>
-              <a:t>★  FINAL CHALLENGE</a:t>
-            </a:r>
-            <a:endParaRPr lang="en-US" sz="1300" dirty="0"/>
+              <a:t>CHECK</a:t>
+            </a:r>
+            <a:endParaRPr lang="en-US" sz="1200" dirty="0"/>
           </a:p>
         </p:txBody>
       </p:sp>
@@ -3010,8 +3105,8 @@
         </p:nvSpPr>
         <p:spPr>
           <a:xfrm>
-            <a:off x="502920" y="1097280"/>
-            <a:ext cx="11155680" cy="731520"/>
+            <a:off x="1737360" y="457200"/>
+            <a:ext cx="9875520" cy="420624"/>
           </a:xfrm>
           <a:prstGeom prst="rect">
             <a:avLst/>
@@ -3027,34 +3122,76 @@
               <a:buNone/>
             </a:pPr>
             <a:r>
-              <a:rPr lang="en-US" sz="3400" b="1" dirty="0">
-                <a:solidFill>
-                  <a:srgbClr val="101828"/>
+              <a:rPr lang="en-US" sz="1500" dirty="0">
+                <a:solidFill>
+                  <a:srgbClr val="667085"/>
                 </a:solidFill>
                 <a:latin typeface="IBM Plex Sans" pitchFamily="34" charset="0"/>
                 <a:ea typeface="IBM Plex Sans" pitchFamily="34" charset="-122"/>
                 <a:cs typeface="IBM Plex Sans" pitchFamily="34" charset="-120"/>
               </a:rPr>
-              <a:t>Name that attack</a:t>
-            </a:r>
-            <a:endParaRPr lang="en-US" sz="3400" dirty="0"/>
-          </a:p>
-        </p:txBody>
-      </p:sp>
-      <p:sp>
-        <p:nvSpPr>
-          <p:cNvPr id="8" name="Shape 6"/>
+              <a:t>Hands down. Everyone commits.</a:t>
+            </a:r>
+            <a:endParaRPr lang="en-US" sz="1500" dirty="0"/>
+          </a:p>
+        </p:txBody>
+      </p:sp>
+      <p:sp>
+        <p:nvSpPr>
+          <p:cNvPr id="8" name="Text 6"/>
+          <p:cNvSpPr txBox="1"/>
+          <p:nvPr/>
+        </p:nvSpPr>
+        <p:spPr>
+          <a:xfrm>
+            <a:off x="502920" y="1097280"/>
+            <a:ext cx="11155680" cy="914400"/>
+          </a:xfrm>
+          <a:prstGeom prst="rect">
+            <a:avLst/>
+          </a:prstGeom>
+          <a:noFill/>
+          <a:ln/>
+        </p:spPr>
+        <p:txBody>
+          <a:bodyPr wrap="square" lIns="0" tIns="0" rIns="0" bIns="0" rtlCol="0" anchor="ctr"/>
+          <a:lstStyle/>
+          <a:p>
+            <a:pPr indent="0" marL="0">
+              <a:lnSpc>
+                <a:spcPct val="115000"/>
+              </a:lnSpc>
+              <a:buNone/>
+            </a:pPr>
+            <a:r>
+              <a:rPr lang="en-US" sz="2600" b="1" dirty="0">
+                <a:solidFill>
+                  <a:srgbClr val="101828"/>
+                </a:solidFill>
+                <a:latin typeface="IBM Plex Sans" pitchFamily="34" charset="0"/>
+                <a:ea typeface="IBM Plex Sans" pitchFamily="34" charset="-122"/>
+                <a:cs typeface="IBM Plex Sans" pitchFamily="34" charset="-120"/>
+              </a:rPr>
+              <a:t>What type of malware was CryptoLocker?</a:t>
+            </a:r>
+            <a:endParaRPr lang="en-US" sz="2600" dirty="0"/>
+          </a:p>
+        </p:txBody>
+      </p:sp>
+      <p:sp>
+        <p:nvSpPr>
+          <p:cNvPr id="9" name="Shape 7"/>
           <p:cNvSpPr/>
           <p:nvPr/>
         </p:nvSpPr>
         <p:spPr>
           <a:xfrm>
-            <a:off x="502920" y="2011680"/>
-            <a:ext cx="11155680" cy="2194560"/>
+            <a:off x="502920" y="2148840"/>
+            <a:ext cx="11155680" cy="731520"/>
           </a:xfrm>
           <a:prstGeom prst="roundRect">
             <a:avLst>
-              <a:gd name="adj" fmla="val 5000"/>
+              <a:gd name="adj" fmla="val 15000"/>
             </a:avLst>
           </a:prstGeom>
           <a:solidFill>
@@ -3062,7 +3199,7 @@
           </a:solidFill>
           <a:ln w="15875">
             <a:solidFill>
-              <a:srgbClr val="2D63FF"/>
+              <a:srgbClr val="D9DEE7"/>
             </a:solidFill>
             <a:prstDash val="solid"/>
           </a:ln>
@@ -3070,14 +3207,75 @@
       </p:sp>
       <p:sp>
         <p:nvSpPr>
-          <p:cNvPr id="9" name="Text 7"/>
-          <p:cNvSpPr txBox="1"/>
-          <p:nvPr/>
-        </p:nvSpPr>
-        <p:spPr>
-          <a:xfrm>
-            <a:off x="1005840" y="2331720"/>
-            <a:ext cx="10149840" cy="1554480"/>
+          <p:cNvPr id="10" name="Shape 8"/>
+          <p:cNvSpPr/>
+          <p:nvPr/>
+        </p:nvSpPr>
+        <p:spPr>
+          <a:xfrm>
+            <a:off x="777240" y="2295144"/>
+            <a:ext cx="438912" cy="438912"/>
+          </a:xfrm>
+          <a:prstGeom prst="roundRect">
+            <a:avLst>
+              <a:gd name="adj" fmla="val 20833"/>
+            </a:avLst>
+          </a:prstGeom>
+          <a:solidFill>
+            <a:srgbClr val="EEF2FB"/>
+          </a:solidFill>
+          <a:ln/>
+        </p:spPr>
+      </p:sp>
+      <p:sp>
+        <p:nvSpPr>
+          <p:cNvPr id="11" name="Text 9"/>
+          <p:cNvSpPr txBox="1"/>
+          <p:nvPr/>
+        </p:nvSpPr>
+        <p:spPr>
+          <a:xfrm>
+            <a:off x="777240" y="2295144"/>
+            <a:ext cx="438912" cy="438912"/>
+          </a:xfrm>
+          <a:prstGeom prst="rect">
+            <a:avLst/>
+          </a:prstGeom>
+          <a:noFill/>
+          <a:ln/>
+        </p:spPr>
+        <p:txBody>
+          <a:bodyPr wrap="square" lIns="0" tIns="0" rIns="0" bIns="0" rtlCol="0" anchor="ctr"/>
+          <a:lstStyle/>
+          <a:p>
+            <a:pPr algn="ctr" indent="0" marL="0">
+              <a:buNone/>
+            </a:pPr>
+            <a:r>
+              <a:rPr lang="en-US" sz="1300" b="1" dirty="0">
+                <a:solidFill>
+                  <a:srgbClr val="2D63FF"/>
+                </a:solidFill>
+                <a:latin typeface="IBM Plex Mono" pitchFamily="34" charset="0"/>
+                <a:ea typeface="IBM Plex Mono" pitchFamily="34" charset="-122"/>
+                <a:cs typeface="IBM Plex Mono" pitchFamily="34" charset="-120"/>
+              </a:rPr>
+              <a:t>A</a:t>
+            </a:r>
+            <a:endParaRPr lang="en-US" sz="1300" dirty="0"/>
+          </a:p>
+        </p:txBody>
+      </p:sp>
+      <p:sp>
+        <p:nvSpPr>
+          <p:cNvPr id="12" name="Text 10"/>
+          <p:cNvSpPr txBox="1"/>
+          <p:nvPr/>
+        </p:nvSpPr>
+        <p:spPr>
+          <a:xfrm>
+            <a:off x="1417320" y="2148840"/>
+            <a:ext cx="10058400" cy="731520"/>
           </a:xfrm>
           <a:prstGeom prst="rect">
             <a:avLst/>
@@ -3091,12 +3289,12 @@
           <a:p>
             <a:pPr indent="0" marL="0">
               <a:lnSpc>
-                <a:spcPct val="130000"/>
+                <a:spcPct val="115000"/>
               </a:lnSpc>
               <a:buNone/>
             </a:pPr>
             <a:r>
-              <a:rPr lang="en-US" sz="2200" dirty="0">
+              <a:rPr lang="en-US" sz="1700" dirty="0">
                 <a:solidFill>
                   <a:srgbClr val="101828"/>
                 </a:solidFill>
@@ -3104,22 +3302,110 @@
                 <a:ea typeface="IBM Plex Sans" pitchFamily="34" charset="-122"/>
                 <a:cs typeface="IBM Plex Sans" pitchFamily="34" charset="-120"/>
               </a:rPr>
-              <a:t>Eight incidents have been reported to the security team. Tap the star and sort each one into the form of attack it describes.</a:t>
-            </a:r>
-            <a:endParaRPr lang="en-US" sz="2200" dirty="0"/>
-          </a:p>
-        </p:txBody>
-      </p:sp>
-      <p:sp>
-        <p:nvSpPr>
-          <p:cNvPr id="10" name="Text 8"/>
-          <p:cNvSpPr txBox="1"/>
-          <p:nvPr/>
-        </p:nvSpPr>
-        <p:spPr>
-          <a:xfrm>
-            <a:off x="502920" y="4526280"/>
-            <a:ext cx="11155680" cy="457200"/>
+              <a:t>Spyware</a:t>
+            </a:r>
+            <a:endParaRPr lang="en-US" sz="1700" dirty="0"/>
+          </a:p>
+        </p:txBody>
+      </p:sp>
+      <p:sp>
+        <p:nvSpPr>
+          <p:cNvPr id="13" name="Shape 11"/>
+          <p:cNvSpPr/>
+          <p:nvPr/>
+        </p:nvSpPr>
+        <p:spPr>
+          <a:xfrm>
+            <a:off x="502920" y="3017520"/>
+            <a:ext cx="11155680" cy="731520"/>
+          </a:xfrm>
+          <a:prstGeom prst="roundRect">
+            <a:avLst>
+              <a:gd name="adj" fmla="val 15000"/>
+            </a:avLst>
+          </a:prstGeom>
+          <a:solidFill>
+            <a:srgbClr val="FFFFFF"/>
+          </a:solidFill>
+          <a:ln w="15875">
+            <a:solidFill>
+              <a:srgbClr val="D9DEE7"/>
+            </a:solidFill>
+            <a:prstDash val="solid"/>
+          </a:ln>
+        </p:spPr>
+      </p:sp>
+      <p:sp>
+        <p:nvSpPr>
+          <p:cNvPr id="14" name="Shape 12"/>
+          <p:cNvSpPr/>
+          <p:nvPr/>
+        </p:nvSpPr>
+        <p:spPr>
+          <a:xfrm>
+            <a:off x="777240" y="3163824"/>
+            <a:ext cx="438912" cy="438912"/>
+          </a:xfrm>
+          <a:prstGeom prst="roundRect">
+            <a:avLst>
+              <a:gd name="adj" fmla="val 20833"/>
+            </a:avLst>
+          </a:prstGeom>
+          <a:solidFill>
+            <a:srgbClr val="EEF2FB"/>
+          </a:solidFill>
+          <a:ln/>
+        </p:spPr>
+      </p:sp>
+      <p:sp>
+        <p:nvSpPr>
+          <p:cNvPr id="15" name="Text 13"/>
+          <p:cNvSpPr txBox="1"/>
+          <p:nvPr/>
+        </p:nvSpPr>
+        <p:spPr>
+          <a:xfrm>
+            <a:off x="777240" y="3163824"/>
+            <a:ext cx="438912" cy="438912"/>
+          </a:xfrm>
+          <a:prstGeom prst="rect">
+            <a:avLst/>
+          </a:prstGeom>
+          <a:noFill/>
+          <a:ln/>
+        </p:spPr>
+        <p:txBody>
+          <a:bodyPr wrap="square" lIns="0" tIns="0" rIns="0" bIns="0" rtlCol="0" anchor="ctr"/>
+          <a:lstStyle/>
+          <a:p>
+            <a:pPr algn="ctr" indent="0" marL="0">
+              <a:buNone/>
+            </a:pPr>
+            <a:r>
+              <a:rPr lang="en-US" sz="1300" b="1" dirty="0">
+                <a:solidFill>
+                  <a:srgbClr val="2D63FF"/>
+                </a:solidFill>
+                <a:latin typeface="IBM Plex Mono" pitchFamily="34" charset="0"/>
+                <a:ea typeface="IBM Plex Mono" pitchFamily="34" charset="-122"/>
+                <a:cs typeface="IBM Plex Mono" pitchFamily="34" charset="-120"/>
+              </a:rPr>
+              <a:t>B</a:t>
+            </a:r>
+            <a:endParaRPr lang="en-US" sz="1300" dirty="0"/>
+          </a:p>
+        </p:txBody>
+      </p:sp>
+      <p:sp>
+        <p:nvSpPr>
+          <p:cNvPr id="16" name="Text 14"/>
+          <p:cNvSpPr txBox="1"/>
+          <p:nvPr/>
+        </p:nvSpPr>
+        <p:spPr>
+          <a:xfrm>
+            <a:off x="1417320" y="3017520"/>
+            <a:ext cx="10058400" cy="731520"/>
           </a:xfrm>
           <a:prstGeom prst="rect">
             <a:avLst/>
@@ -3132,20 +3418,283 @@
           <a:lstStyle/>
           <a:p>
             <a:pPr indent="0" marL="0">
-              <a:buNone/>
-            </a:pPr>
-            <a:r>
-              <a:rPr lang="en-US" sz="1600" dirty="0">
-                <a:solidFill>
-                  <a:srgbClr val="667085"/>
+              <a:lnSpc>
+                <a:spcPct val="115000"/>
+              </a:lnSpc>
+              <a:buNone/>
+            </a:pPr>
+            <a:r>
+              <a:rPr lang="en-US" sz="1700" dirty="0">
+                <a:solidFill>
+                  <a:srgbClr val="101828"/>
                 </a:solidFill>
                 <a:latin typeface="IBM Plex Sans" pitchFamily="34" charset="0"/>
                 <a:ea typeface="IBM Plex Sans" pitchFamily="34" charset="-122"/>
                 <a:cs typeface="IBM Plex Sans" pitchFamily="34" charset="-120"/>
               </a:rPr>
-              <a:t>Predict on paper first, then look down and test it.</a:t>
-            </a:r>
-            <a:endParaRPr lang="en-US" sz="1600" dirty="0"/>
+              <a:t>A firewall</a:t>
+            </a:r>
+            <a:endParaRPr lang="en-US" sz="1700" dirty="0"/>
+          </a:p>
+        </p:txBody>
+      </p:sp>
+      <p:sp>
+        <p:nvSpPr>
+          <p:cNvPr id="17" name="Shape 15"/>
+          <p:cNvSpPr/>
+          <p:nvPr/>
+        </p:nvSpPr>
+        <p:spPr>
+          <a:xfrm>
+            <a:off x="502920" y="3886200"/>
+            <a:ext cx="11155680" cy="731520"/>
+          </a:xfrm>
+          <a:prstGeom prst="roundRect">
+            <a:avLst>
+              <a:gd name="adj" fmla="val 15000"/>
+            </a:avLst>
+          </a:prstGeom>
+          <a:solidFill>
+            <a:srgbClr val="FFFFFF"/>
+          </a:solidFill>
+          <a:ln w="15875">
+            <a:solidFill>
+              <a:srgbClr val="D9DEE7"/>
+            </a:solidFill>
+            <a:prstDash val="solid"/>
+          </a:ln>
+        </p:spPr>
+      </p:sp>
+      <p:sp>
+        <p:nvSpPr>
+          <p:cNvPr id="18" name="Shape 16"/>
+          <p:cNvSpPr/>
+          <p:nvPr/>
+        </p:nvSpPr>
+        <p:spPr>
+          <a:xfrm>
+            <a:off x="777240" y="4032504"/>
+            <a:ext cx="438912" cy="438912"/>
+          </a:xfrm>
+          <a:prstGeom prst="roundRect">
+            <a:avLst>
+              <a:gd name="adj" fmla="val 20833"/>
+            </a:avLst>
+          </a:prstGeom>
+          <a:solidFill>
+            <a:srgbClr val="EEF2FB"/>
+          </a:solidFill>
+          <a:ln/>
+        </p:spPr>
+      </p:sp>
+      <p:sp>
+        <p:nvSpPr>
+          <p:cNvPr id="19" name="Text 17"/>
+          <p:cNvSpPr txBox="1"/>
+          <p:nvPr/>
+        </p:nvSpPr>
+        <p:spPr>
+          <a:xfrm>
+            <a:off x="777240" y="4032504"/>
+            <a:ext cx="438912" cy="438912"/>
+          </a:xfrm>
+          <a:prstGeom prst="rect">
+            <a:avLst/>
+          </a:prstGeom>
+          <a:noFill/>
+          <a:ln/>
+        </p:spPr>
+        <p:txBody>
+          <a:bodyPr wrap="square" lIns="0" tIns="0" rIns="0" bIns="0" rtlCol="0" anchor="ctr"/>
+          <a:lstStyle/>
+          <a:p>
+            <a:pPr algn="ctr" indent="0" marL="0">
+              <a:buNone/>
+            </a:pPr>
+            <a:r>
+              <a:rPr lang="en-US" sz="1300" b="1" dirty="0">
+                <a:solidFill>
+                  <a:srgbClr val="2D63FF"/>
+                </a:solidFill>
+                <a:latin typeface="IBM Plex Mono" pitchFamily="34" charset="0"/>
+                <a:ea typeface="IBM Plex Mono" pitchFamily="34" charset="-122"/>
+                <a:cs typeface="IBM Plex Mono" pitchFamily="34" charset="-120"/>
+              </a:rPr>
+              <a:t>C</a:t>
+            </a:r>
+            <a:endParaRPr lang="en-US" sz="1300" dirty="0"/>
+          </a:p>
+        </p:txBody>
+      </p:sp>
+      <p:sp>
+        <p:nvSpPr>
+          <p:cNvPr id="20" name="Text 18"/>
+          <p:cNvSpPr txBox="1"/>
+          <p:nvPr/>
+        </p:nvSpPr>
+        <p:spPr>
+          <a:xfrm>
+            <a:off x="1417320" y="3886200"/>
+            <a:ext cx="10058400" cy="731520"/>
+          </a:xfrm>
+          <a:prstGeom prst="rect">
+            <a:avLst/>
+          </a:prstGeom>
+          <a:noFill/>
+          <a:ln/>
+        </p:spPr>
+        <p:txBody>
+          <a:bodyPr wrap="square" lIns="0" tIns="0" rIns="0" bIns="0" rtlCol="0" anchor="ctr"/>
+          <a:lstStyle/>
+          <a:p>
+            <a:pPr indent="0" marL="0">
+              <a:lnSpc>
+                <a:spcPct val="115000"/>
+              </a:lnSpc>
+              <a:buNone/>
+            </a:pPr>
+            <a:r>
+              <a:rPr lang="en-US" sz="1700" dirty="0">
+                <a:solidFill>
+                  <a:srgbClr val="101828"/>
+                </a:solidFill>
+                <a:latin typeface="IBM Plex Sans" pitchFamily="34" charset="0"/>
+                <a:ea typeface="IBM Plex Sans" pitchFamily="34" charset="-122"/>
+                <a:cs typeface="IBM Plex Sans" pitchFamily="34" charset="-120"/>
+              </a:rPr>
+              <a:t>Ransomware</a:t>
+            </a:r>
+            <a:endParaRPr lang="en-US" sz="1700" dirty="0"/>
+          </a:p>
+        </p:txBody>
+      </p:sp>
+      <p:sp>
+        <p:nvSpPr>
+          <p:cNvPr id="21" name="Shape 19"/>
+          <p:cNvSpPr/>
+          <p:nvPr/>
+        </p:nvSpPr>
+        <p:spPr>
+          <a:xfrm>
+            <a:off x="502920" y="4754880"/>
+            <a:ext cx="11155680" cy="731520"/>
+          </a:xfrm>
+          <a:prstGeom prst="roundRect">
+            <a:avLst>
+              <a:gd name="adj" fmla="val 15000"/>
+            </a:avLst>
+          </a:prstGeom>
+          <a:solidFill>
+            <a:srgbClr val="FFFFFF"/>
+          </a:solidFill>
+          <a:ln w="15875">
+            <a:solidFill>
+              <a:srgbClr val="D9DEE7"/>
+            </a:solidFill>
+            <a:prstDash val="solid"/>
+          </a:ln>
+        </p:spPr>
+      </p:sp>
+      <p:sp>
+        <p:nvSpPr>
+          <p:cNvPr id="22" name="Shape 20"/>
+          <p:cNvSpPr/>
+          <p:nvPr/>
+        </p:nvSpPr>
+        <p:spPr>
+          <a:xfrm>
+            <a:off x="777240" y="4901184"/>
+            <a:ext cx="438912" cy="438912"/>
+          </a:xfrm>
+          <a:prstGeom prst="roundRect">
+            <a:avLst>
+              <a:gd name="adj" fmla="val 20833"/>
+            </a:avLst>
+          </a:prstGeom>
+          <a:solidFill>
+            <a:srgbClr val="EEF2FB"/>
+          </a:solidFill>
+          <a:ln/>
+        </p:spPr>
+      </p:sp>
+      <p:sp>
+        <p:nvSpPr>
+          <p:cNvPr id="23" name="Text 21"/>
+          <p:cNvSpPr txBox="1"/>
+          <p:nvPr/>
+        </p:nvSpPr>
+        <p:spPr>
+          <a:xfrm>
+            <a:off x="777240" y="4901184"/>
+            <a:ext cx="438912" cy="438912"/>
+          </a:xfrm>
+          <a:prstGeom prst="rect">
+            <a:avLst/>
+          </a:prstGeom>
+          <a:noFill/>
+          <a:ln/>
+        </p:spPr>
+        <p:txBody>
+          <a:bodyPr wrap="square" lIns="0" tIns="0" rIns="0" bIns="0" rtlCol="0" anchor="ctr"/>
+          <a:lstStyle/>
+          <a:p>
+            <a:pPr algn="ctr" indent="0" marL="0">
+              <a:buNone/>
+            </a:pPr>
+            <a:r>
+              <a:rPr lang="en-US" sz="1300" b="1" dirty="0">
+                <a:solidFill>
+                  <a:srgbClr val="2D63FF"/>
+                </a:solidFill>
+                <a:latin typeface="IBM Plex Mono" pitchFamily="34" charset="0"/>
+                <a:ea typeface="IBM Plex Mono" pitchFamily="34" charset="-122"/>
+                <a:cs typeface="IBM Plex Mono" pitchFamily="34" charset="-120"/>
+              </a:rPr>
+              <a:t>D</a:t>
+            </a:r>
+            <a:endParaRPr lang="en-US" sz="1300" dirty="0"/>
+          </a:p>
+        </p:txBody>
+      </p:sp>
+      <p:sp>
+        <p:nvSpPr>
+          <p:cNvPr id="24" name="Text 22"/>
+          <p:cNvSpPr txBox="1"/>
+          <p:nvPr/>
+        </p:nvSpPr>
+        <p:spPr>
+          <a:xfrm>
+            <a:off x="1417320" y="4754880"/>
+            <a:ext cx="10058400" cy="731520"/>
+          </a:xfrm>
+          <a:prstGeom prst="rect">
+            <a:avLst/>
+          </a:prstGeom>
+          <a:noFill/>
+          <a:ln/>
+        </p:spPr>
+        <p:txBody>
+          <a:bodyPr wrap="square" lIns="0" tIns="0" rIns="0" bIns="0" rtlCol="0" anchor="ctr"/>
+          <a:lstStyle/>
+          <a:p>
+            <a:pPr indent="0" marL="0">
+              <a:lnSpc>
+                <a:spcPct val="115000"/>
+              </a:lnSpc>
+              <a:buNone/>
+            </a:pPr>
+            <a:r>
+              <a:rPr lang="en-US" sz="1700" dirty="0">
+                <a:solidFill>
+                  <a:srgbClr val="101828"/>
+                </a:solidFill>
+                <a:latin typeface="IBM Plex Sans" pitchFamily="34" charset="0"/>
+                <a:ea typeface="IBM Plex Sans" pitchFamily="34" charset="-122"/>
+                <a:cs typeface="IBM Plex Sans" pitchFamily="34" charset="-120"/>
+              </a:rPr>
+              <a:t>A worm with no payload</a:t>
+            </a:r>
+            <a:endParaRPr lang="en-US" sz="1700" dirty="0"/>
           </a:p>
         </p:txBody>
       </p:sp>
@@ -3281,14 +3830,75 @@
       </p:sp>
       <p:sp>
         <p:nvSpPr>
-          <p:cNvPr id="5" name="Text 3"/>
-          <p:cNvSpPr txBox="1"/>
-          <p:nvPr/>
-        </p:nvSpPr>
-        <p:spPr>
-          <a:xfrm>
-            <a:off x="502920" y="411480"/>
-            <a:ext cx="11155680" cy="777240"/>
+          <p:cNvPr id="5" name="Shape 3"/>
+          <p:cNvSpPr/>
+          <p:nvPr/>
+        </p:nvSpPr>
+        <p:spPr>
+          <a:xfrm>
+            <a:off x="502920" y="438912"/>
+            <a:ext cx="3108960" cy="502920"/>
+          </a:xfrm>
+          <a:prstGeom prst="roundRect">
+            <a:avLst>
+              <a:gd name="adj" fmla="val 18182"/>
+            </a:avLst>
+          </a:prstGeom>
+          <a:solidFill>
+            <a:srgbClr val="F4B942"/>
+          </a:solidFill>
+          <a:ln/>
+        </p:spPr>
+      </p:sp>
+      <p:sp>
+        <p:nvSpPr>
+          <p:cNvPr id="6" name="Text 4"/>
+          <p:cNvSpPr txBox="1"/>
+          <p:nvPr/>
+        </p:nvSpPr>
+        <p:spPr>
+          <a:xfrm>
+            <a:off x="502920" y="438912"/>
+            <a:ext cx="3108960" cy="502920"/>
+          </a:xfrm>
+          <a:prstGeom prst="rect">
+            <a:avLst/>
+          </a:prstGeom>
+          <a:noFill/>
+          <a:ln/>
+        </p:spPr>
+        <p:txBody>
+          <a:bodyPr wrap="square" lIns="0" tIns="0" rIns="0" bIns="0" rtlCol="0" anchor="ctr"/>
+          <a:lstStyle/>
+          <a:p>
+            <a:pPr algn="ctr" indent="0" marL="0">
+              <a:buNone/>
+            </a:pPr>
+            <a:r>
+              <a:rPr lang="en-US" sz="1300" b="1" dirty="0">
+                <a:solidFill>
+                  <a:srgbClr val="101828"/>
+                </a:solidFill>
+                <a:latin typeface="IBM Plex Mono" pitchFamily="34" charset="0"/>
+                <a:ea typeface="IBM Plex Mono" pitchFamily="34" charset="-122"/>
+                <a:cs typeface="IBM Plex Mono" pitchFamily="34" charset="-120"/>
+              </a:rPr>
+              <a:t>★  FINAL CHALLENGE</a:t>
+            </a:r>
+            <a:endParaRPr lang="en-US" sz="1300" dirty="0"/>
+          </a:p>
+        </p:txBody>
+      </p:sp>
+      <p:sp>
+        <p:nvSpPr>
+          <p:cNvPr id="7" name="Text 5"/>
+          <p:cNvSpPr txBox="1"/>
+          <p:nvPr/>
+        </p:nvSpPr>
+        <p:spPr>
+          <a:xfrm>
+            <a:off x="502920" y="1097280"/>
+            <a:ext cx="11155680" cy="731520"/>
           </a:xfrm>
           <a:prstGeom prst="rect">
             <a:avLst/>
@@ -3304,7 +3914,7 @@
               <a:buNone/>
             </a:pPr>
             <a:r>
-              <a:rPr lang="en-US" sz="3200" b="1" dirty="0">
+              <a:rPr lang="en-US" sz="3400" b="1" dirty="0">
                 <a:solidFill>
                   <a:srgbClr val="101828"/>
                 </a:solidFill>
@@ -3312,65 +3922,26 @@
                 <a:ea typeface="IBM Plex Sans" pitchFamily="34" charset="-122"/>
                 <a:cs typeface="IBM Plex Sans" pitchFamily="34" charset="-120"/>
               </a:rPr>
-              <a:t>Worth knowing</a:t>
-            </a:r>
-            <a:endParaRPr lang="en-US" sz="3200" dirty="0"/>
-          </a:p>
-        </p:txBody>
-      </p:sp>
-      <p:sp>
-        <p:nvSpPr>
-          <p:cNvPr id="6" name="Text 4"/>
-          <p:cNvSpPr txBox="1"/>
-          <p:nvPr/>
-        </p:nvSpPr>
-        <p:spPr>
-          <a:xfrm>
-            <a:off x="502920" y="1170432"/>
-            <a:ext cx="11155680" cy="411480"/>
-          </a:xfrm>
-          <a:prstGeom prst="rect">
-            <a:avLst/>
-          </a:prstGeom>
-          <a:noFill/>
-          <a:ln/>
-        </p:spPr>
-        <p:txBody>
-          <a:bodyPr wrap="square" lIns="0" tIns="0" rIns="0" bIns="0" rtlCol="0" anchor="ctr"/>
-          <a:lstStyle/>
-          <a:p>
-            <a:pPr indent="0" marL="0">
-              <a:buNone/>
-            </a:pPr>
-            <a:r>
-              <a:rPr lang="en-US" sz="1500" dirty="0">
-                <a:solidFill>
-                  <a:srgbClr val="667085"/>
-                </a:solidFill>
-                <a:latin typeface="IBM Plex Sans" pitchFamily="34" charset="0"/>
-                <a:ea typeface="IBM Plex Sans" pitchFamily="34" charset="-122"/>
-                <a:cs typeface="IBM Plex Sans" pitchFamily="34" charset="-120"/>
-              </a:rPr>
-              <a:t>The information markers dotted around the room</a:t>
-            </a:r>
-            <a:endParaRPr lang="en-US" sz="1500" dirty="0"/>
-          </a:p>
-        </p:txBody>
-      </p:sp>
-      <p:sp>
-        <p:nvSpPr>
-          <p:cNvPr id="7" name="Shape 5"/>
+              <a:t>Name that attack</a:t>
+            </a:r>
+            <a:endParaRPr lang="en-US" sz="3400" dirty="0"/>
+          </a:p>
+        </p:txBody>
+      </p:sp>
+      <p:sp>
+        <p:nvSpPr>
+          <p:cNvPr id="8" name="Shape 6"/>
           <p:cNvSpPr/>
           <p:nvPr/>
         </p:nvSpPr>
         <p:spPr>
           <a:xfrm>
-            <a:off x="502920" y="1828800"/>
-            <a:ext cx="5394960" cy="1737360"/>
+            <a:off x="502920" y="2011680"/>
+            <a:ext cx="11155680" cy="2194560"/>
           </a:xfrm>
           <a:prstGeom prst="roundRect">
             <a:avLst>
-              <a:gd name="adj" fmla="val 6316"/>
+              <a:gd name="adj" fmla="val 5000"/>
             </a:avLst>
           </a:prstGeom>
           <a:solidFill>
@@ -3386,14 +3957,14 @@
       </p:sp>
       <p:sp>
         <p:nvSpPr>
-          <p:cNvPr id="8" name="Text 6"/>
-          <p:cNvSpPr txBox="1"/>
-          <p:nvPr/>
-        </p:nvSpPr>
-        <p:spPr>
-          <a:xfrm>
-            <a:off x="822960" y="2011680"/>
-            <a:ext cx="4754880" cy="365760"/>
+          <p:cNvPr id="9" name="Text 7"/>
+          <p:cNvSpPr txBox="1"/>
+          <p:nvPr/>
+        </p:nvSpPr>
+        <p:spPr>
+          <a:xfrm>
+            <a:off x="1005840" y="2331720"/>
+            <a:ext cx="10149840" cy="1554480"/>
           </a:xfrm>
           <a:prstGeom prst="rect">
             <a:avLst/>
@@ -3406,52 +3977,52 @@
           <a:lstStyle/>
           <a:p>
             <a:pPr indent="0" marL="0">
-              <a:buNone/>
-            </a:pPr>
-            <a:r>
-              <a:rPr lang="en-US" sz="1600" b="1" dirty="0">
-                <a:solidFill>
-                  <a:srgbClr val="2D63FF"/>
+              <a:lnSpc>
+                <a:spcPct val="130000"/>
+              </a:lnSpc>
+              <a:buNone/>
+            </a:pPr>
+            <a:r>
+              <a:rPr lang="en-US" sz="2200" dirty="0">
+                <a:solidFill>
+                  <a:srgbClr val="101828"/>
                 </a:solidFill>
                 <a:latin typeface="IBM Plex Sans" pitchFamily="34" charset="0"/>
                 <a:ea typeface="IBM Plex Sans" pitchFamily="34" charset="-122"/>
                 <a:cs typeface="IBM Plex Sans" pitchFamily="34" charset="-120"/>
               </a:rPr>
-              <a:t>White hats and black hats</a:t>
-            </a:r>
-            <a:endParaRPr lang="en-US" sz="1600" dirty="0"/>
-          </a:p>
-        </p:txBody>
-      </p:sp>
-      <p:sp>
-        <p:nvSpPr>
-          <p:cNvPr id="9" name="Text 7"/>
-          <p:cNvSpPr txBox="1"/>
-          <p:nvPr/>
-        </p:nvSpPr>
-        <p:spPr>
-          <a:xfrm>
-            <a:off x="822960" y="2395728"/>
-            <a:ext cx="4754880" cy="1005840"/>
-          </a:xfrm>
-          <a:prstGeom prst="rect">
-            <a:avLst/>
-          </a:prstGeom>
-          <a:noFill/>
-          <a:ln/>
-        </p:spPr>
-        <p:txBody>
-          <a:bodyPr wrap="square" lIns="0" tIns="0" rIns="0" bIns="0" rtlCol="0" anchor="t"/>
+              <a:t>Eight incidents have been reported to the security team. Tap the star and sort each one into the form of attack it describes.</a:t>
+            </a:r>
+            <a:endParaRPr lang="en-US" sz="2200" dirty="0"/>
+          </a:p>
+        </p:txBody>
+      </p:sp>
+      <p:sp>
+        <p:nvSpPr>
+          <p:cNvPr id="10" name="Text 8"/>
+          <p:cNvSpPr txBox="1"/>
+          <p:nvPr/>
+        </p:nvSpPr>
+        <p:spPr>
+          <a:xfrm>
+            <a:off x="502920" y="4526280"/>
+            <a:ext cx="11155680" cy="457200"/>
+          </a:xfrm>
+          <a:prstGeom prst="rect">
+            <a:avLst/>
+          </a:prstGeom>
+          <a:noFill/>
+          <a:ln/>
+        </p:spPr>
+        <p:txBody>
+          <a:bodyPr wrap="square" lIns="0" tIns="0" rIns="0" bIns="0" rtlCol="0" anchor="ctr"/>
           <a:lstStyle/>
           <a:p>
             <a:pPr indent="0" marL="0">
-              <a:lnSpc>
-                <a:spcPct val="120000"/>
-              </a:lnSpc>
-              <a:buNone/>
-            </a:pPr>
-            <a:r>
-              <a:rPr lang="en-US" sz="1300" dirty="0">
+              <a:buNone/>
+            </a:pPr>
+            <a:r>
+              <a:rPr lang="en-US" sz="1600" dirty="0">
                 <a:solidFill>
                   <a:srgbClr val="667085"/>
                 </a:solidFill>
@@ -3459,333 +4030,9 @@
                 <a:ea typeface="IBM Plex Sans" pitchFamily="34" charset="-122"/>
                 <a:cs typeface="IBM Plex Sans" pitchFamily="34" charset="-120"/>
               </a:rPr>
-              <a:t>Attackers who break in illegally are called black hats. White hats do the same thing with permission, to help organisations find weaknesses before criminals do.</a:t>
-            </a:r>
-            <a:endParaRPr lang="en-US" sz="1300" dirty="0"/>
-          </a:p>
-        </p:txBody>
-      </p:sp>
-      <p:sp>
-        <p:nvSpPr>
-          <p:cNvPr id="10" name="Shape 8"/>
-          <p:cNvSpPr/>
-          <p:nvPr/>
-        </p:nvSpPr>
-        <p:spPr>
-          <a:xfrm>
-            <a:off x="6217920" y="1828800"/>
-            <a:ext cx="5394960" cy="1737360"/>
-          </a:xfrm>
-          <a:prstGeom prst="roundRect">
-            <a:avLst>
-              <a:gd name="adj" fmla="val 6316"/>
-            </a:avLst>
-          </a:prstGeom>
-          <a:solidFill>
-            <a:srgbClr val="FFFFFF"/>
-          </a:solidFill>
-          <a:ln w="15875">
-            <a:solidFill>
-              <a:srgbClr val="08A6A6"/>
-            </a:solidFill>
-            <a:prstDash val="solid"/>
-          </a:ln>
-        </p:spPr>
-      </p:sp>
-      <p:sp>
-        <p:nvSpPr>
-          <p:cNvPr id="11" name="Text 9"/>
-          <p:cNvSpPr txBox="1"/>
-          <p:nvPr/>
-        </p:nvSpPr>
-        <p:spPr>
-          <a:xfrm>
-            <a:off x="6537960" y="2011680"/>
-            <a:ext cx="4754880" cy="365760"/>
-          </a:xfrm>
-          <a:prstGeom prst="rect">
-            <a:avLst/>
-          </a:prstGeom>
-          <a:noFill/>
-          <a:ln/>
-        </p:spPr>
-        <p:txBody>
-          <a:bodyPr wrap="square" lIns="0" tIns="0" rIns="0" bIns="0" rtlCol="0" anchor="ctr"/>
-          <a:lstStyle/>
-          <a:p>
-            <a:pPr indent="0" marL="0">
-              <a:buNone/>
-            </a:pPr>
-            <a:r>
-              <a:rPr lang="en-US" sz="1600" b="1" dirty="0">
-                <a:solidFill>
-                  <a:srgbClr val="08A6A6"/>
-                </a:solidFill>
-                <a:latin typeface="IBM Plex Sans" pitchFamily="34" charset="0"/>
-                <a:ea typeface="IBM Plex Sans" pitchFamily="34" charset="-122"/>
-                <a:cs typeface="IBM Plex Sans" pitchFamily="34" charset="-120"/>
-              </a:rPr>
-              <a:t>Attacks per day</a:t>
+              <a:t>Predict on paper first, then look down and test it.</a:t>
             </a:r>
             <a:endParaRPr lang="en-US" sz="1600" dirty="0"/>
-          </a:p>
-        </p:txBody>
-      </p:sp>
-      <p:sp>
-        <p:nvSpPr>
-          <p:cNvPr id="12" name="Text 10"/>
-          <p:cNvSpPr txBox="1"/>
-          <p:nvPr/>
-        </p:nvSpPr>
-        <p:spPr>
-          <a:xfrm>
-            <a:off x="6537960" y="2395728"/>
-            <a:ext cx="4754880" cy="1005840"/>
-          </a:xfrm>
-          <a:prstGeom prst="rect">
-            <a:avLst/>
-          </a:prstGeom>
-          <a:noFill/>
-          <a:ln/>
-        </p:spPr>
-        <p:txBody>
-          <a:bodyPr wrap="square" lIns="0" tIns="0" rIns="0" bIns="0" rtlCol="0" anchor="t"/>
-          <a:lstStyle/>
-          <a:p>
-            <a:pPr indent="0" marL="0">
-              <a:lnSpc>
-                <a:spcPct val="120000"/>
-              </a:lnSpc>
-              <a:buNone/>
-            </a:pPr>
-            <a:r>
-              <a:rPr lang="en-US" sz="1300" dirty="0">
-                <a:solidFill>
-                  <a:srgbClr val="667085"/>
-                </a:solidFill>
-                <a:latin typeface="IBM Plex Sans" pitchFamily="34" charset="0"/>
-                <a:ea typeface="IBM Plex Sans" pitchFamily="34" charset="-122"/>
-                <a:cs typeface="IBM Plex Sans" pitchFamily="34" charset="-120"/>
-              </a:rPr>
-              <a:t>Large organisations see thousands of attempted attacks every day. Most are automated programs scanning for weaknesses, not people.</a:t>
-            </a:r>
-            <a:endParaRPr lang="en-US" sz="1300" dirty="0"/>
-          </a:p>
-        </p:txBody>
-      </p:sp>
-      <p:sp>
-        <p:nvSpPr>
-          <p:cNvPr id="13" name="Shape 11"/>
-          <p:cNvSpPr/>
-          <p:nvPr/>
-        </p:nvSpPr>
-        <p:spPr>
-          <a:xfrm>
-            <a:off x="502920" y="3794760"/>
-            <a:ext cx="5394960" cy="1737360"/>
-          </a:xfrm>
-          <a:prstGeom prst="roundRect">
-            <a:avLst>
-              <a:gd name="adj" fmla="val 6316"/>
-            </a:avLst>
-          </a:prstGeom>
-          <a:solidFill>
-            <a:srgbClr val="FFFFFF"/>
-          </a:solidFill>
-          <a:ln w="15875">
-            <a:solidFill>
-              <a:srgbClr val="2D63FF"/>
-            </a:solidFill>
-            <a:prstDash val="solid"/>
-          </a:ln>
-        </p:spPr>
-      </p:sp>
-      <p:sp>
-        <p:nvSpPr>
-          <p:cNvPr id="14" name="Text 12"/>
-          <p:cNvSpPr txBox="1"/>
-          <p:nvPr/>
-        </p:nvSpPr>
-        <p:spPr>
-          <a:xfrm>
-            <a:off x="822960" y="3977640"/>
-            <a:ext cx="4754880" cy="365760"/>
-          </a:xfrm>
-          <a:prstGeom prst="rect">
-            <a:avLst/>
-          </a:prstGeom>
-          <a:noFill/>
-          <a:ln/>
-        </p:spPr>
-        <p:txBody>
-          <a:bodyPr wrap="square" lIns="0" tIns="0" rIns="0" bIns="0" rtlCol="0" anchor="ctr"/>
-          <a:lstStyle/>
-          <a:p>
-            <a:pPr indent="0" marL="0">
-              <a:buNone/>
-            </a:pPr>
-            <a:r>
-              <a:rPr lang="en-US" sz="1600" b="1" dirty="0">
-                <a:solidFill>
-                  <a:srgbClr val="2D63FF"/>
-                </a:solidFill>
-                <a:latin typeface="IBM Plex Sans" pitchFamily="34" charset="0"/>
-                <a:ea typeface="IBM Plex Sans" pitchFamily="34" charset="-122"/>
-                <a:cs typeface="IBM Plex Sans" pitchFamily="34" charset="-120"/>
-              </a:rPr>
-              <a:t>Hacktivism</a:t>
-            </a:r>
-            <a:endParaRPr lang="en-US" sz="1600" dirty="0"/>
-          </a:p>
-        </p:txBody>
-      </p:sp>
-      <p:sp>
-        <p:nvSpPr>
-          <p:cNvPr id="15" name="Text 13"/>
-          <p:cNvSpPr txBox="1"/>
-          <p:nvPr/>
-        </p:nvSpPr>
-        <p:spPr>
-          <a:xfrm>
-            <a:off x="822960" y="4361688"/>
-            <a:ext cx="4754880" cy="1005840"/>
-          </a:xfrm>
-          <a:prstGeom prst="rect">
-            <a:avLst/>
-          </a:prstGeom>
-          <a:noFill/>
-          <a:ln/>
-        </p:spPr>
-        <p:txBody>
-          <a:bodyPr wrap="square" lIns="0" tIns="0" rIns="0" bIns="0" rtlCol="0" anchor="t"/>
-          <a:lstStyle/>
-          <a:p>
-            <a:pPr indent="0" marL="0">
-              <a:lnSpc>
-                <a:spcPct val="120000"/>
-              </a:lnSpc>
-              <a:buNone/>
-            </a:pPr>
-            <a:r>
-              <a:rPr lang="en-US" sz="1300" dirty="0">
-                <a:solidFill>
-                  <a:srgbClr val="667085"/>
-                </a:solidFill>
-                <a:latin typeface="IBM Plex Sans" pitchFamily="34" charset="0"/>
-                <a:ea typeface="IBM Plex Sans" pitchFamily="34" charset="-122"/>
-                <a:cs typeface="IBM Plex Sans" pitchFamily="34" charset="-120"/>
-              </a:rPr>
-              <a:t>Some attacks are political: groups attack organisations they disagree with to make a point. This is called hacktivism.</a:t>
-            </a:r>
-            <a:endParaRPr lang="en-US" sz="1300" dirty="0"/>
-          </a:p>
-        </p:txBody>
-      </p:sp>
-      <p:sp>
-        <p:nvSpPr>
-          <p:cNvPr id="16" name="Shape 14"/>
-          <p:cNvSpPr/>
-          <p:nvPr/>
-        </p:nvSpPr>
-        <p:spPr>
-          <a:xfrm>
-            <a:off x="6217920" y="3794760"/>
-            <a:ext cx="5394960" cy="1737360"/>
-          </a:xfrm>
-          <a:prstGeom prst="roundRect">
-            <a:avLst>
-              <a:gd name="adj" fmla="val 6316"/>
-            </a:avLst>
-          </a:prstGeom>
-          <a:solidFill>
-            <a:srgbClr val="FFFFFF"/>
-          </a:solidFill>
-          <a:ln w="15875">
-            <a:solidFill>
-              <a:srgbClr val="08A6A6"/>
-            </a:solidFill>
-            <a:prstDash val="solid"/>
-          </a:ln>
-        </p:spPr>
-      </p:sp>
-      <p:sp>
-        <p:nvSpPr>
-          <p:cNvPr id="17" name="Text 15"/>
-          <p:cNvSpPr txBox="1"/>
-          <p:nvPr/>
-        </p:nvSpPr>
-        <p:spPr>
-          <a:xfrm>
-            <a:off x="6537960" y="3977640"/>
-            <a:ext cx="4754880" cy="365760"/>
-          </a:xfrm>
-          <a:prstGeom prst="rect">
-            <a:avLst/>
-          </a:prstGeom>
-          <a:noFill/>
-          <a:ln/>
-        </p:spPr>
-        <p:txBody>
-          <a:bodyPr wrap="square" lIns="0" tIns="0" rIns="0" bIns="0" rtlCol="0" anchor="ctr"/>
-          <a:lstStyle/>
-          <a:p>
-            <a:pPr indent="0" marL="0">
-              <a:buNone/>
-            </a:pPr>
-            <a:r>
-              <a:rPr lang="en-US" sz="1600" b="1" dirty="0">
-                <a:solidFill>
-                  <a:srgbClr val="08A6A6"/>
-                </a:solidFill>
-                <a:latin typeface="IBM Plex Sans" pitchFamily="34" charset="0"/>
-                <a:ea typeface="IBM Plex Sans" pitchFamily="34" charset="-122"/>
-                <a:cs typeface="IBM Plex Sans" pitchFamily="34" charset="-120"/>
-              </a:rPr>
-              <a:t>Paying doesn't help</a:t>
-            </a:r>
-            <a:endParaRPr lang="en-US" sz="1600" dirty="0"/>
-          </a:p>
-        </p:txBody>
-      </p:sp>
-      <p:sp>
-        <p:nvSpPr>
-          <p:cNvPr id="18" name="Text 16"/>
-          <p:cNvSpPr txBox="1"/>
-          <p:nvPr/>
-        </p:nvSpPr>
-        <p:spPr>
-          <a:xfrm>
-            <a:off x="6537960" y="4361688"/>
-            <a:ext cx="4754880" cy="1005840"/>
-          </a:xfrm>
-          <a:prstGeom prst="rect">
-            <a:avLst/>
-          </a:prstGeom>
-          <a:noFill/>
-          <a:ln/>
-        </p:spPr>
-        <p:txBody>
-          <a:bodyPr wrap="square" lIns="0" tIns="0" rIns="0" bIns="0" rtlCol="0" anchor="t"/>
-          <a:lstStyle/>
-          <a:p>
-            <a:pPr indent="0" marL="0">
-              <a:lnSpc>
-                <a:spcPct val="120000"/>
-              </a:lnSpc>
-              <a:buNone/>
-            </a:pPr>
-            <a:r>
-              <a:rPr lang="en-US" sz="1300" dirty="0">
-                <a:solidFill>
-                  <a:srgbClr val="667085"/>
-                </a:solidFill>
-                <a:latin typeface="IBM Plex Sans" pitchFamily="34" charset="0"/>
-                <a:ea typeface="IBM Plex Sans" pitchFamily="34" charset="-122"/>
-                <a:cs typeface="IBM Plex Sans" pitchFamily="34" charset="-120"/>
-              </a:rPr>
-              <a:t>Police advise against paying ransoms: it funds more crime and the files often stay locked. Good backups are a far better defence.</a:t>
-            </a:r>
-            <a:endParaRPr lang="en-US" sz="1300" dirty="0"/>
           </a:p>
         </p:txBody>
       </p:sp>
@@ -3952,7 +4199,7 @@
                 <a:ea typeface="IBM Plex Sans" pitchFamily="34" charset="-122"/>
                 <a:cs typeface="IBM Plex Sans" pitchFamily="34" charset="-120"/>
               </a:rPr>
-              <a:t>Exam practice</a:t>
+              <a:t>Worth knowing</a:t>
             </a:r>
             <a:endParaRPr lang="en-US" sz="3200" dirty="0"/>
           </a:p>
@@ -3991,7 +4238,7 @@
                 <a:ea typeface="IBM Plex Sans" pitchFamily="34" charset="-122"/>
                 <a:cs typeface="IBM Plex Sans" pitchFamily="34" charset="-120"/>
               </a:rPr>
-              <a:t>Devices away. Answer from memory on the worksheet.</a:t>
+              <a:t>The information markers dotted around the room</a:t>
             </a:r>
             <a:endParaRPr lang="en-US" sz="1500" dirty="0"/>
           </a:p>
@@ -4006,11 +4253,11 @@
         <p:spPr>
           <a:xfrm>
             <a:off x="502920" y="1828800"/>
-            <a:ext cx="11155680" cy="1097280"/>
+            <a:ext cx="5394960" cy="1737360"/>
           </a:xfrm>
           <a:prstGeom prst="roundRect">
             <a:avLst>
-              <a:gd name="adj" fmla="val 10000"/>
+              <a:gd name="adj" fmla="val 6316"/>
             </a:avLst>
           </a:prstGeom>
           <a:solidFill>
@@ -4018,7 +4265,7 @@
           </a:solidFill>
           <a:ln w="15875">
             <a:solidFill>
-              <a:srgbClr val="D9DEE7"/>
+              <a:srgbClr val="2D63FF"/>
             </a:solidFill>
             <a:prstDash val="solid"/>
           </a:ln>
@@ -4032,8 +4279,8 @@
         </p:nvSpPr>
         <p:spPr>
           <a:xfrm>
-            <a:off x="914400" y="1938528"/>
-            <a:ext cx="9418320" cy="877824"/>
+            <a:off x="822960" y="2011680"/>
+            <a:ext cx="4754880" cy="365760"/>
           </a:xfrm>
           <a:prstGeom prst="rect">
             <a:avLst/>
@@ -4046,101 +4293,79 @@
           <a:lstStyle/>
           <a:p>
             <a:pPr indent="0" marL="0">
-              <a:lnSpc>
-                <a:spcPct val="118000"/>
-              </a:lnSpc>
-              <a:buNone/>
-            </a:pPr>
-            <a:r>
-              <a:rPr lang="en-US" sz="1700" dirty="0">
-                <a:solidFill>
-                  <a:srgbClr val="101828"/>
+              <a:buNone/>
+            </a:pPr>
+            <a:r>
+              <a:rPr lang="en-US" sz="1600" b="1" dirty="0">
+                <a:solidFill>
+                  <a:srgbClr val="2D63FF"/>
                 </a:solidFill>
                 <a:latin typeface="IBM Plex Sans" pitchFamily="34" charset="0"/>
                 <a:ea typeface="IBM Plex Sans" pitchFamily="34" charset="-122"/>
                 <a:cs typeface="IBM Plex Sans" pitchFamily="34" charset="-120"/>
               </a:rPr>
-              <a:t>Name two forms of attack that target people rather than software.</a:t>
-            </a:r>
-            <a:endParaRPr lang="en-US" sz="1700" dirty="0"/>
-          </a:p>
-        </p:txBody>
-      </p:sp>
-      <p:sp>
-        <p:nvSpPr>
-          <p:cNvPr id="9" name="Shape 7"/>
+              <a:t>White hats and black hats</a:t>
+            </a:r>
+            <a:endParaRPr lang="en-US" sz="1600" dirty="0"/>
+          </a:p>
+        </p:txBody>
+      </p:sp>
+      <p:sp>
+        <p:nvSpPr>
+          <p:cNvPr id="9" name="Text 7"/>
+          <p:cNvSpPr txBox="1"/>
+          <p:nvPr/>
+        </p:nvSpPr>
+        <p:spPr>
+          <a:xfrm>
+            <a:off x="822960" y="2395728"/>
+            <a:ext cx="4754880" cy="1005840"/>
+          </a:xfrm>
+          <a:prstGeom prst="rect">
+            <a:avLst/>
+          </a:prstGeom>
+          <a:noFill/>
+          <a:ln/>
+        </p:spPr>
+        <p:txBody>
+          <a:bodyPr wrap="square" lIns="0" tIns="0" rIns="0" bIns="0" rtlCol="0" anchor="t"/>
+          <a:lstStyle/>
+          <a:p>
+            <a:pPr indent="0" marL="0">
+              <a:lnSpc>
+                <a:spcPct val="120000"/>
+              </a:lnSpc>
+              <a:buNone/>
+            </a:pPr>
+            <a:r>
+              <a:rPr lang="en-US" sz="1300" dirty="0">
+                <a:solidFill>
+                  <a:srgbClr val="667085"/>
+                </a:solidFill>
+                <a:latin typeface="IBM Plex Sans" pitchFamily="34" charset="0"/>
+                <a:ea typeface="IBM Plex Sans" pitchFamily="34" charset="-122"/>
+                <a:cs typeface="IBM Plex Sans" pitchFamily="34" charset="-120"/>
+              </a:rPr>
+              <a:t>Attackers who break in illegally are called black hats. White hats do the same thing with permission, to help organisations find weaknesses before criminals do.</a:t>
+            </a:r>
+            <a:endParaRPr lang="en-US" sz="1300" dirty="0"/>
+          </a:p>
+        </p:txBody>
+      </p:sp>
+      <p:sp>
+        <p:nvSpPr>
+          <p:cNvPr id="10" name="Shape 8"/>
           <p:cNvSpPr/>
           <p:nvPr/>
         </p:nvSpPr>
         <p:spPr>
           <a:xfrm>
-            <a:off x="10515600" y="2130552"/>
-            <a:ext cx="868680" cy="493776"/>
+            <a:off x="6217920" y="1828800"/>
+            <a:ext cx="5394960" cy="1737360"/>
           </a:xfrm>
           <a:prstGeom prst="roundRect">
             <a:avLst>
-              <a:gd name="adj" fmla="val 18519"/>
-            </a:avLst>
-          </a:prstGeom>
-          <a:solidFill>
-            <a:srgbClr val="EEF2FB"/>
-          </a:solidFill>
-          <a:ln/>
-        </p:spPr>
-      </p:sp>
-      <p:sp>
-        <p:nvSpPr>
-          <p:cNvPr id="10" name="Text 8"/>
-          <p:cNvSpPr txBox="1"/>
-          <p:nvPr/>
-        </p:nvSpPr>
-        <p:spPr>
-          <a:xfrm>
-            <a:off x="10515600" y="2130552"/>
-            <a:ext cx="868680" cy="493776"/>
-          </a:xfrm>
-          <a:prstGeom prst="rect">
-            <a:avLst/>
-          </a:prstGeom>
-          <a:noFill/>
-          <a:ln/>
-        </p:spPr>
-        <p:txBody>
-          <a:bodyPr wrap="square" lIns="0" tIns="0" rIns="0" bIns="0" rtlCol="0" anchor="ctr"/>
-          <a:lstStyle/>
-          <a:p>
-            <a:pPr algn="ctr" indent="0" marL="0">
-              <a:buNone/>
-            </a:pPr>
-            <a:r>
-              <a:rPr lang="en-US" sz="1500" b="1" dirty="0">
-                <a:solidFill>
-                  <a:srgbClr val="2D63FF"/>
-                </a:solidFill>
-                <a:latin typeface="IBM Plex Mono" pitchFamily="34" charset="0"/>
-                <a:ea typeface="IBM Plex Mono" pitchFamily="34" charset="-122"/>
-                <a:cs typeface="IBM Plex Mono" pitchFamily="34" charset="-120"/>
-              </a:rPr>
-              <a:t>[2]</a:t>
-            </a:r>
-            <a:endParaRPr lang="en-US" sz="1500" dirty="0"/>
-          </a:p>
-        </p:txBody>
-      </p:sp>
-      <p:sp>
-        <p:nvSpPr>
-          <p:cNvPr id="11" name="Shape 9"/>
-          <p:cNvSpPr/>
-          <p:nvPr/>
-        </p:nvSpPr>
-        <p:spPr>
-          <a:xfrm>
-            <a:off x="502920" y="3127248"/>
-            <a:ext cx="11155680" cy="1097280"/>
-          </a:xfrm>
-          <a:prstGeom prst="roundRect">
-            <a:avLst>
-              <a:gd name="adj" fmla="val 10000"/>
+              <a:gd name="adj" fmla="val 6316"/>
             </a:avLst>
           </a:prstGeom>
           <a:solidFill>
@@ -4148,7 +4373,7 @@
           </a:solidFill>
           <a:ln w="15875">
             <a:solidFill>
-              <a:srgbClr val="D9DEE7"/>
+              <a:srgbClr val="08A6A6"/>
             </a:solidFill>
             <a:prstDash val="solid"/>
           </a:ln>
@@ -4156,14 +4381,14 @@
       </p:sp>
       <p:sp>
         <p:nvSpPr>
-          <p:cNvPr id="12" name="Text 10"/>
-          <p:cNvSpPr txBox="1"/>
-          <p:nvPr/>
-        </p:nvSpPr>
-        <p:spPr>
-          <a:xfrm>
-            <a:off x="914400" y="3236976"/>
-            <a:ext cx="9418320" cy="877824"/>
+          <p:cNvPr id="11" name="Text 9"/>
+          <p:cNvSpPr txBox="1"/>
+          <p:nvPr/>
+        </p:nvSpPr>
+        <p:spPr>
+          <a:xfrm>
+            <a:off x="6537960" y="2011680"/>
+            <a:ext cx="4754880" cy="365760"/>
           </a:xfrm>
           <a:prstGeom prst="rect">
             <a:avLst/>
@@ -4176,23 +4401,62 @@
           <a:lstStyle/>
           <a:p>
             <a:pPr indent="0" marL="0">
-              <a:lnSpc>
-                <a:spcPct val="118000"/>
-              </a:lnSpc>
-              <a:buNone/>
-            </a:pPr>
-            <a:r>
-              <a:rPr lang="en-US" sz="1700" dirty="0">
-                <a:solidFill>
-                  <a:srgbClr val="101828"/>
+              <a:buNone/>
+            </a:pPr>
+            <a:r>
+              <a:rPr lang="en-US" sz="1600" b="1" dirty="0">
+                <a:solidFill>
+                  <a:srgbClr val="08A6A6"/>
                 </a:solidFill>
                 <a:latin typeface="IBM Plex Sans" pitchFamily="34" charset="0"/>
                 <a:ea typeface="IBM Plex Sans" pitchFamily="34" charset="-122"/>
                 <a:cs typeface="IBM Plex Sans" pitchFamily="34" charset="-120"/>
               </a:rPr>
-              <a:t>Explain why most criminal cyberattacks happen.</a:t>
-            </a:r>
-            <a:endParaRPr lang="en-US" sz="1700" dirty="0"/>
+              <a:t>Attacks per day</a:t>
+            </a:r>
+            <a:endParaRPr lang="en-US" sz="1600" dirty="0"/>
+          </a:p>
+        </p:txBody>
+      </p:sp>
+      <p:sp>
+        <p:nvSpPr>
+          <p:cNvPr id="12" name="Text 10"/>
+          <p:cNvSpPr txBox="1"/>
+          <p:nvPr/>
+        </p:nvSpPr>
+        <p:spPr>
+          <a:xfrm>
+            <a:off x="6537960" y="2395728"/>
+            <a:ext cx="4754880" cy="1005840"/>
+          </a:xfrm>
+          <a:prstGeom prst="rect">
+            <a:avLst/>
+          </a:prstGeom>
+          <a:noFill/>
+          <a:ln/>
+        </p:spPr>
+        <p:txBody>
+          <a:bodyPr wrap="square" lIns="0" tIns="0" rIns="0" bIns="0" rtlCol="0" anchor="t"/>
+          <a:lstStyle/>
+          <a:p>
+            <a:pPr indent="0" marL="0">
+              <a:lnSpc>
+                <a:spcPct val="120000"/>
+              </a:lnSpc>
+              <a:buNone/>
+            </a:pPr>
+            <a:r>
+              <a:rPr lang="en-US" sz="1300" dirty="0">
+                <a:solidFill>
+                  <a:srgbClr val="667085"/>
+                </a:solidFill>
+                <a:latin typeface="IBM Plex Sans" pitchFamily="34" charset="0"/>
+                <a:ea typeface="IBM Plex Sans" pitchFamily="34" charset="-122"/>
+                <a:cs typeface="IBM Plex Sans" pitchFamily="34" charset="-120"/>
+              </a:rPr>
+              <a:t>Large organisations see thousands of attempted attacks every day. Most are automated programs scanning for weaknesses, not people.</a:t>
+            </a:r>
+            <a:endParaRPr lang="en-US" sz="1300" dirty="0"/>
           </a:p>
         </p:txBody>
       </p:sp>
@@ -4204,73 +4468,12 @@
         </p:nvSpPr>
         <p:spPr>
           <a:xfrm>
-            <a:off x="10515600" y="3429000"/>
-            <a:ext cx="868680" cy="493776"/>
+            <a:off x="502920" y="3794760"/>
+            <a:ext cx="5394960" cy="1737360"/>
           </a:xfrm>
           <a:prstGeom prst="roundRect">
             <a:avLst>
-              <a:gd name="adj" fmla="val 18519"/>
-            </a:avLst>
-          </a:prstGeom>
-          <a:solidFill>
-            <a:srgbClr val="EEF2FB"/>
-          </a:solidFill>
-          <a:ln/>
-        </p:spPr>
-      </p:sp>
-      <p:sp>
-        <p:nvSpPr>
-          <p:cNvPr id="14" name="Text 12"/>
-          <p:cNvSpPr txBox="1"/>
-          <p:nvPr/>
-        </p:nvSpPr>
-        <p:spPr>
-          <a:xfrm>
-            <a:off x="10515600" y="3429000"/>
-            <a:ext cx="868680" cy="493776"/>
-          </a:xfrm>
-          <a:prstGeom prst="rect">
-            <a:avLst/>
-          </a:prstGeom>
-          <a:noFill/>
-          <a:ln/>
-        </p:spPr>
-        <p:txBody>
-          <a:bodyPr wrap="square" lIns="0" tIns="0" rIns="0" bIns="0" rtlCol="0" anchor="ctr"/>
-          <a:lstStyle/>
-          <a:p>
-            <a:pPr algn="ctr" indent="0" marL="0">
-              <a:buNone/>
-            </a:pPr>
-            <a:r>
-              <a:rPr lang="en-US" sz="1500" b="1" dirty="0">
-                <a:solidFill>
-                  <a:srgbClr val="2D63FF"/>
-                </a:solidFill>
-                <a:latin typeface="IBM Plex Mono" pitchFamily="34" charset="0"/>
-                <a:ea typeface="IBM Plex Mono" pitchFamily="34" charset="-122"/>
-                <a:cs typeface="IBM Plex Mono" pitchFamily="34" charset="-120"/>
-              </a:rPr>
-              <a:t>[2]</a:t>
-            </a:r>
-            <a:endParaRPr lang="en-US" sz="1500" dirty="0"/>
-          </a:p>
-        </p:txBody>
-      </p:sp>
-      <p:sp>
-        <p:nvSpPr>
-          <p:cNvPr id="15" name="Shape 13"/>
-          <p:cNvSpPr/>
-          <p:nvPr/>
-        </p:nvSpPr>
-        <p:spPr>
-          <a:xfrm>
-            <a:off x="502920" y="4425696"/>
-            <a:ext cx="11155680" cy="1097280"/>
-          </a:xfrm>
-          <a:prstGeom prst="roundRect">
-            <a:avLst>
-              <a:gd name="adj" fmla="val 10000"/>
+              <a:gd name="adj" fmla="val 6316"/>
             </a:avLst>
           </a:prstGeom>
           <a:solidFill>
@@ -4278,7 +4481,7 @@
           </a:solidFill>
           <a:ln w="15875">
             <a:solidFill>
-              <a:srgbClr val="D9DEE7"/>
+              <a:srgbClr val="2D63FF"/>
             </a:solidFill>
             <a:prstDash val="solid"/>
           </a:ln>
@@ -4286,14 +4489,14 @@
       </p:sp>
       <p:sp>
         <p:nvSpPr>
-          <p:cNvPr id="16" name="Text 14"/>
-          <p:cNvSpPr txBox="1"/>
-          <p:nvPr/>
-        </p:nvSpPr>
-        <p:spPr>
-          <a:xfrm>
-            <a:off x="914400" y="4535424"/>
-            <a:ext cx="9418320" cy="877824"/>
+          <p:cNvPr id="14" name="Text 12"/>
+          <p:cNvSpPr txBox="1"/>
+          <p:nvPr/>
+        </p:nvSpPr>
+        <p:spPr>
+          <a:xfrm>
+            <a:off x="822960" y="3977640"/>
+            <a:ext cx="4754880" cy="365760"/>
           </a:xfrm>
           <a:prstGeom prst="rect">
             <a:avLst/>
@@ -4306,47 +4509,130 @@
           <a:lstStyle/>
           <a:p>
             <a:pPr indent="0" marL="0">
-              <a:lnSpc>
-                <a:spcPct val="118000"/>
-              </a:lnSpc>
-              <a:buNone/>
-            </a:pPr>
-            <a:r>
-              <a:rPr lang="en-US" sz="1700" dirty="0">
-                <a:solidFill>
-                  <a:srgbClr val="101828"/>
+              <a:buNone/>
+            </a:pPr>
+            <a:r>
+              <a:rPr lang="en-US" sz="1600" b="1" dirty="0">
+                <a:solidFill>
+                  <a:srgbClr val="2D63FF"/>
                 </a:solidFill>
                 <a:latin typeface="IBM Plex Sans" pitchFamily="34" charset="0"/>
                 <a:ea typeface="IBM Plex Sans" pitchFamily="34" charset="-122"/>
                 <a:cs typeface="IBM Plex Sans" pitchFamily="34" charset="-120"/>
               </a:rPr>
-              <a:t>A small business is hit by ransomware. Describe three costs it will face beyond the ransom itself.</a:t>
-            </a:r>
-            <a:endParaRPr lang="en-US" sz="1700" dirty="0"/>
-          </a:p>
-        </p:txBody>
-      </p:sp>
-      <p:sp>
-        <p:nvSpPr>
-          <p:cNvPr id="17" name="Shape 15"/>
+              <a:t>Hacktivism</a:t>
+            </a:r>
+            <a:endParaRPr lang="en-US" sz="1600" dirty="0"/>
+          </a:p>
+        </p:txBody>
+      </p:sp>
+      <p:sp>
+        <p:nvSpPr>
+          <p:cNvPr id="15" name="Text 13"/>
+          <p:cNvSpPr txBox="1"/>
+          <p:nvPr/>
+        </p:nvSpPr>
+        <p:spPr>
+          <a:xfrm>
+            <a:off x="822960" y="4361688"/>
+            <a:ext cx="4754880" cy="1005840"/>
+          </a:xfrm>
+          <a:prstGeom prst="rect">
+            <a:avLst/>
+          </a:prstGeom>
+          <a:noFill/>
+          <a:ln/>
+        </p:spPr>
+        <p:txBody>
+          <a:bodyPr wrap="square" lIns="0" tIns="0" rIns="0" bIns="0" rtlCol="0" anchor="t"/>
+          <a:lstStyle/>
+          <a:p>
+            <a:pPr indent="0" marL="0">
+              <a:lnSpc>
+                <a:spcPct val="120000"/>
+              </a:lnSpc>
+              <a:buNone/>
+            </a:pPr>
+            <a:r>
+              <a:rPr lang="en-US" sz="1300" dirty="0">
+                <a:solidFill>
+                  <a:srgbClr val="667085"/>
+                </a:solidFill>
+                <a:latin typeface="IBM Plex Sans" pitchFamily="34" charset="0"/>
+                <a:ea typeface="IBM Plex Sans" pitchFamily="34" charset="-122"/>
+                <a:cs typeface="IBM Plex Sans" pitchFamily="34" charset="-120"/>
+              </a:rPr>
+              <a:t>Some attacks are political: groups attack organisations they disagree with to make a point. This is called hacktivism.</a:t>
+            </a:r>
+            <a:endParaRPr lang="en-US" sz="1300" dirty="0"/>
+          </a:p>
+        </p:txBody>
+      </p:sp>
+      <p:sp>
+        <p:nvSpPr>
+          <p:cNvPr id="16" name="Shape 14"/>
           <p:cNvSpPr/>
           <p:nvPr/>
         </p:nvSpPr>
         <p:spPr>
           <a:xfrm>
-            <a:off x="10515600" y="4727448"/>
-            <a:ext cx="868680" cy="493776"/>
+            <a:off x="6217920" y="3794760"/>
+            <a:ext cx="5394960" cy="1737360"/>
           </a:xfrm>
           <a:prstGeom prst="roundRect">
             <a:avLst>
-              <a:gd name="adj" fmla="val 18519"/>
+              <a:gd name="adj" fmla="val 6316"/>
             </a:avLst>
           </a:prstGeom>
           <a:solidFill>
-            <a:srgbClr val="EEF2FB"/>
+            <a:srgbClr val="FFFFFF"/>
           </a:solidFill>
-          <a:ln/>
-        </p:spPr>
+          <a:ln w="15875">
+            <a:solidFill>
+              <a:srgbClr val="08A6A6"/>
+            </a:solidFill>
+            <a:prstDash val="solid"/>
+          </a:ln>
+        </p:spPr>
+      </p:sp>
+      <p:sp>
+        <p:nvSpPr>
+          <p:cNvPr id="17" name="Text 15"/>
+          <p:cNvSpPr txBox="1"/>
+          <p:nvPr/>
+        </p:nvSpPr>
+        <p:spPr>
+          <a:xfrm>
+            <a:off x="6537960" y="3977640"/>
+            <a:ext cx="4754880" cy="365760"/>
+          </a:xfrm>
+          <a:prstGeom prst="rect">
+            <a:avLst/>
+          </a:prstGeom>
+          <a:noFill/>
+          <a:ln/>
+        </p:spPr>
+        <p:txBody>
+          <a:bodyPr wrap="square" lIns="0" tIns="0" rIns="0" bIns="0" rtlCol="0" anchor="ctr"/>
+          <a:lstStyle/>
+          <a:p>
+            <a:pPr indent="0" marL="0">
+              <a:buNone/>
+            </a:pPr>
+            <a:r>
+              <a:rPr lang="en-US" sz="1600" b="1" dirty="0">
+                <a:solidFill>
+                  <a:srgbClr val="08A6A6"/>
+                </a:solidFill>
+                <a:latin typeface="IBM Plex Sans" pitchFamily="34" charset="0"/>
+                <a:ea typeface="IBM Plex Sans" pitchFamily="34" charset="-122"/>
+                <a:cs typeface="IBM Plex Sans" pitchFamily="34" charset="-120"/>
+              </a:rPr>
+              <a:t>Paying doesn't help</a:t>
+            </a:r>
+            <a:endParaRPr lang="en-US" sz="1600" dirty="0"/>
+          </a:p>
+        </p:txBody>
       </p:sp>
       <p:sp>
         <p:nvSpPr>
@@ -4356,34 +4642,37 @@
         </p:nvSpPr>
         <p:spPr>
           <a:xfrm>
-            <a:off x="10515600" y="4727448"/>
-            <a:ext cx="868680" cy="493776"/>
-          </a:xfrm>
-          <a:prstGeom prst="rect">
-            <a:avLst/>
-          </a:prstGeom>
-          <a:noFill/>
-          <a:ln/>
-        </p:spPr>
-        <p:txBody>
-          <a:bodyPr wrap="square" lIns="0" tIns="0" rIns="0" bIns="0" rtlCol="0" anchor="ctr"/>
-          <a:lstStyle/>
-          <a:p>
-            <a:pPr algn="ctr" indent="0" marL="0">
-              <a:buNone/>
-            </a:pPr>
-            <a:r>
-              <a:rPr lang="en-US" sz="1500" b="1" dirty="0">
-                <a:solidFill>
-                  <a:srgbClr val="2D63FF"/>
-                </a:solidFill>
-                <a:latin typeface="IBM Plex Mono" pitchFamily="34" charset="0"/>
-                <a:ea typeface="IBM Plex Mono" pitchFamily="34" charset="-122"/>
-                <a:cs typeface="IBM Plex Mono" pitchFamily="34" charset="-120"/>
-              </a:rPr>
-              <a:t>[6]</a:t>
-            </a:r>
-            <a:endParaRPr lang="en-US" sz="1500" dirty="0"/>
+            <a:off x="6537960" y="4361688"/>
+            <a:ext cx="4754880" cy="1005840"/>
+          </a:xfrm>
+          <a:prstGeom prst="rect">
+            <a:avLst/>
+          </a:prstGeom>
+          <a:noFill/>
+          <a:ln/>
+        </p:spPr>
+        <p:txBody>
+          <a:bodyPr wrap="square" lIns="0" tIns="0" rIns="0" bIns="0" rtlCol="0" anchor="t"/>
+          <a:lstStyle/>
+          <a:p>
+            <a:pPr indent="0" marL="0">
+              <a:lnSpc>
+                <a:spcPct val="120000"/>
+              </a:lnSpc>
+              <a:buNone/>
+            </a:pPr>
+            <a:r>
+              <a:rPr lang="en-US" sz="1300" dirty="0">
+                <a:solidFill>
+                  <a:srgbClr val="667085"/>
+                </a:solidFill>
+                <a:latin typeface="IBM Plex Sans" pitchFamily="34" charset="0"/>
+                <a:ea typeface="IBM Plex Sans" pitchFamily="34" charset="-122"/>
+                <a:cs typeface="IBM Plex Sans" pitchFamily="34" charset="-120"/>
+              </a:rPr>
+              <a:t>Police advise against paying ransoms: it funds more crime and the files often stay locked. Good backups are a far better defence.</a:t>
+            </a:r>
+            <a:endParaRPr lang="en-US" sz="1300" dirty="0"/>
           </a:p>
         </p:txBody>
       </p:sp>
@@ -4398,6 +4687,604 @@
 <file path=ppt/slides/slide14.xml><?xml version="1.0" encoding="utf-8"?>
 <p:sld xmlns:a="http://schemas.openxmlformats.org/drawingml/2006/main" xmlns:r="http://schemas.openxmlformats.org/officeDocument/2006/relationships" xmlns:p="http://schemas.openxmlformats.org/presentationml/2006/main">
   <p:cSld name="Slide 14">
+    <p:bg>
+      <p:bgPr>
+        <a:solidFill>
+          <a:srgbClr val="F7F7F4"/>
+        </a:solidFill>
+      </p:bgPr>
+    </p:bg>
+    <p:spTree>
+      <p:nvGrpSpPr>
+        <p:cNvPr id="1" name=""/>
+        <p:cNvGrpSpPr/>
+        <p:nvPr/>
+      </p:nvGrpSpPr>
+      <p:grpSpPr>
+        <a:xfrm>
+          <a:off x="0" y="0"/>
+          <a:ext cx="0" cy="0"/>
+          <a:chOff x="0" y="0"/>
+          <a:chExt cx="0" cy="0"/>
+        </a:xfrm>
+      </p:grpSpPr>
+      <p:sp>
+        <p:nvSpPr>
+          <p:cNvPr id="2" name="Shape 0"/>
+          <p:cNvSpPr/>
+          <p:nvPr/>
+        </p:nvSpPr>
+        <p:spPr>
+          <a:xfrm>
+            <a:off x="0" y="0"/>
+            <a:ext cx="12188952" cy="82296"/>
+          </a:xfrm>
+          <a:prstGeom prst="rect">
+            <a:avLst/>
+          </a:prstGeom>
+          <a:solidFill>
+            <a:srgbClr val="2D63FF"/>
+          </a:solidFill>
+          <a:ln/>
+        </p:spPr>
+      </p:sp>
+      <p:sp>
+        <p:nvSpPr>
+          <p:cNvPr id="3" name="Text 1"/>
+          <p:cNvSpPr txBox="1"/>
+          <p:nvPr/>
+        </p:nvSpPr>
+        <p:spPr>
+          <a:xfrm>
+            <a:off x="502920" y="6236208"/>
+            <a:ext cx="7772400" cy="365760"/>
+          </a:xfrm>
+          <a:prstGeom prst="rect">
+            <a:avLst/>
+          </a:prstGeom>
+          <a:noFill/>
+          <a:ln/>
+        </p:spPr>
+        <p:txBody>
+          <a:bodyPr wrap="square" lIns="0" tIns="0" rIns="0" bIns="0" rtlCol="0" anchor="ctr"/>
+          <a:lstStyle/>
+          <a:p>
+            <a:pPr indent="0" marL="0">
+              <a:buNone/>
+            </a:pPr>
+            <a:r>
+              <a:rPr lang="en-US" sz="1100" dirty="0">
+                <a:solidFill>
+                  <a:srgbClr val="667085"/>
+                </a:solidFill>
+                <a:latin typeface="IBM Plex Mono" pitchFamily="34" charset="0"/>
+                <a:ea typeface="IBM Plex Mono" pitchFamily="34" charset="-122"/>
+                <a:cs typeface="IBM Plex Mono" pitchFamily="34" charset="-120"/>
+              </a:rPr>
+              <a:t>1.4 Network security  |  Lesson 1</a:t>
+            </a:r>
+            <a:endParaRPr lang="en-US" sz="1100" dirty="0"/>
+          </a:p>
+        </p:txBody>
+      </p:sp>
+      <p:sp>
+        <p:nvSpPr>
+          <p:cNvPr id="4" name="Text 2"/>
+          <p:cNvSpPr txBox="1"/>
+          <p:nvPr/>
+        </p:nvSpPr>
+        <p:spPr>
+          <a:xfrm>
+            <a:off x="9326880" y="6236208"/>
+            <a:ext cx="2377440" cy="365760"/>
+          </a:xfrm>
+          <a:prstGeom prst="rect">
+            <a:avLst/>
+          </a:prstGeom>
+          <a:noFill/>
+          <a:ln/>
+        </p:spPr>
+        <p:txBody>
+          <a:bodyPr wrap="square" lIns="0" tIns="0" rIns="0" bIns="0" rtlCol="0" anchor="ctr"/>
+          <a:lstStyle/>
+          <a:p>
+            <a:pPr algn="r" indent="0" marL="0">
+              <a:buNone/>
+            </a:pPr>
+            <a:r>
+              <a:rPr lang="en-US" sz="1100" dirty="0">
+                <a:solidFill>
+                  <a:srgbClr val="667085"/>
+                </a:solidFill>
+                <a:latin typeface="IBM Plex Mono" pitchFamily="34" charset="0"/>
+                <a:ea typeface="IBM Plex Mono" pitchFamily="34" charset="-122"/>
+                <a:cs typeface="IBM Plex Mono" pitchFamily="34" charset="-120"/>
+              </a:rPr>
+              <a:t>Revise 360</a:t>
+            </a:r>
+            <a:endParaRPr lang="en-US" sz="1100" dirty="0"/>
+          </a:p>
+        </p:txBody>
+      </p:sp>
+      <p:sp>
+        <p:nvSpPr>
+          <p:cNvPr id="5" name="Text 3"/>
+          <p:cNvSpPr txBox="1"/>
+          <p:nvPr/>
+        </p:nvSpPr>
+        <p:spPr>
+          <a:xfrm>
+            <a:off x="502920" y="411480"/>
+            <a:ext cx="11155680" cy="777240"/>
+          </a:xfrm>
+          <a:prstGeom prst="rect">
+            <a:avLst/>
+          </a:prstGeom>
+          <a:noFill/>
+          <a:ln/>
+        </p:spPr>
+        <p:txBody>
+          <a:bodyPr wrap="square" lIns="0" tIns="0" rIns="0" bIns="0" rtlCol="0" anchor="ctr"/>
+          <a:lstStyle/>
+          <a:p>
+            <a:pPr indent="0" marL="0">
+              <a:buNone/>
+            </a:pPr>
+            <a:r>
+              <a:rPr lang="en-US" sz="3200" b="1" dirty="0">
+                <a:solidFill>
+                  <a:srgbClr val="101828"/>
+                </a:solidFill>
+                <a:latin typeface="IBM Plex Sans" pitchFamily="34" charset="0"/>
+                <a:ea typeface="IBM Plex Sans" pitchFamily="34" charset="-122"/>
+                <a:cs typeface="IBM Plex Sans" pitchFamily="34" charset="-120"/>
+              </a:rPr>
+              <a:t>Exam practice</a:t>
+            </a:r>
+            <a:endParaRPr lang="en-US" sz="3200" dirty="0"/>
+          </a:p>
+        </p:txBody>
+      </p:sp>
+      <p:sp>
+        <p:nvSpPr>
+          <p:cNvPr id="6" name="Text 4"/>
+          <p:cNvSpPr txBox="1"/>
+          <p:nvPr/>
+        </p:nvSpPr>
+        <p:spPr>
+          <a:xfrm>
+            <a:off x="502920" y="1170432"/>
+            <a:ext cx="11155680" cy="411480"/>
+          </a:xfrm>
+          <a:prstGeom prst="rect">
+            <a:avLst/>
+          </a:prstGeom>
+          <a:noFill/>
+          <a:ln/>
+        </p:spPr>
+        <p:txBody>
+          <a:bodyPr wrap="square" lIns="0" tIns="0" rIns="0" bIns="0" rtlCol="0" anchor="ctr"/>
+          <a:lstStyle/>
+          <a:p>
+            <a:pPr indent="0" marL="0">
+              <a:buNone/>
+            </a:pPr>
+            <a:r>
+              <a:rPr lang="en-US" sz="1500" dirty="0">
+                <a:solidFill>
+                  <a:srgbClr val="667085"/>
+                </a:solidFill>
+                <a:latin typeface="IBM Plex Sans" pitchFamily="34" charset="0"/>
+                <a:ea typeface="IBM Plex Sans" pitchFamily="34" charset="-122"/>
+                <a:cs typeface="IBM Plex Sans" pitchFamily="34" charset="-120"/>
+              </a:rPr>
+              <a:t>Devices away. Answer from memory on the worksheet.</a:t>
+            </a:r>
+            <a:endParaRPr lang="en-US" sz="1500" dirty="0"/>
+          </a:p>
+        </p:txBody>
+      </p:sp>
+      <p:sp>
+        <p:nvSpPr>
+          <p:cNvPr id="7" name="Shape 5"/>
+          <p:cNvSpPr/>
+          <p:nvPr/>
+        </p:nvSpPr>
+        <p:spPr>
+          <a:xfrm>
+            <a:off x="502920" y="1828800"/>
+            <a:ext cx="11155680" cy="1097280"/>
+          </a:xfrm>
+          <a:prstGeom prst="roundRect">
+            <a:avLst>
+              <a:gd name="adj" fmla="val 10000"/>
+            </a:avLst>
+          </a:prstGeom>
+          <a:solidFill>
+            <a:srgbClr val="FFFFFF"/>
+          </a:solidFill>
+          <a:ln w="15875">
+            <a:solidFill>
+              <a:srgbClr val="D9DEE7"/>
+            </a:solidFill>
+            <a:prstDash val="solid"/>
+          </a:ln>
+        </p:spPr>
+      </p:sp>
+      <p:sp>
+        <p:nvSpPr>
+          <p:cNvPr id="8" name="Text 6"/>
+          <p:cNvSpPr txBox="1"/>
+          <p:nvPr/>
+        </p:nvSpPr>
+        <p:spPr>
+          <a:xfrm>
+            <a:off x="914400" y="1938528"/>
+            <a:ext cx="9418320" cy="877824"/>
+          </a:xfrm>
+          <a:prstGeom prst="rect">
+            <a:avLst/>
+          </a:prstGeom>
+          <a:noFill/>
+          <a:ln/>
+        </p:spPr>
+        <p:txBody>
+          <a:bodyPr wrap="square" lIns="0" tIns="0" rIns="0" bIns="0" rtlCol="0" anchor="ctr"/>
+          <a:lstStyle/>
+          <a:p>
+            <a:pPr indent="0" marL="0">
+              <a:lnSpc>
+                <a:spcPct val="118000"/>
+              </a:lnSpc>
+              <a:buNone/>
+            </a:pPr>
+            <a:r>
+              <a:rPr lang="en-US" sz="1700" dirty="0">
+                <a:solidFill>
+                  <a:srgbClr val="101828"/>
+                </a:solidFill>
+                <a:latin typeface="IBM Plex Sans" pitchFamily="34" charset="0"/>
+                <a:ea typeface="IBM Plex Sans" pitchFamily="34" charset="-122"/>
+                <a:cs typeface="IBM Plex Sans" pitchFamily="34" charset="-120"/>
+              </a:rPr>
+              <a:t>Name two forms of attack that target people rather than software.</a:t>
+            </a:r>
+            <a:endParaRPr lang="en-US" sz="1700" dirty="0"/>
+          </a:p>
+        </p:txBody>
+      </p:sp>
+      <p:sp>
+        <p:nvSpPr>
+          <p:cNvPr id="9" name="Shape 7"/>
+          <p:cNvSpPr/>
+          <p:nvPr/>
+        </p:nvSpPr>
+        <p:spPr>
+          <a:xfrm>
+            <a:off x="10515600" y="2130552"/>
+            <a:ext cx="868680" cy="493776"/>
+          </a:xfrm>
+          <a:prstGeom prst="roundRect">
+            <a:avLst>
+              <a:gd name="adj" fmla="val 18519"/>
+            </a:avLst>
+          </a:prstGeom>
+          <a:solidFill>
+            <a:srgbClr val="EEF2FB"/>
+          </a:solidFill>
+          <a:ln/>
+        </p:spPr>
+      </p:sp>
+      <p:sp>
+        <p:nvSpPr>
+          <p:cNvPr id="10" name="Text 8"/>
+          <p:cNvSpPr txBox="1"/>
+          <p:nvPr/>
+        </p:nvSpPr>
+        <p:spPr>
+          <a:xfrm>
+            <a:off x="10515600" y="2130552"/>
+            <a:ext cx="868680" cy="493776"/>
+          </a:xfrm>
+          <a:prstGeom prst="rect">
+            <a:avLst/>
+          </a:prstGeom>
+          <a:noFill/>
+          <a:ln/>
+        </p:spPr>
+        <p:txBody>
+          <a:bodyPr wrap="square" lIns="0" tIns="0" rIns="0" bIns="0" rtlCol="0" anchor="ctr"/>
+          <a:lstStyle/>
+          <a:p>
+            <a:pPr algn="ctr" indent="0" marL="0">
+              <a:buNone/>
+            </a:pPr>
+            <a:r>
+              <a:rPr lang="en-US" sz="1500" b="1" dirty="0">
+                <a:solidFill>
+                  <a:srgbClr val="2D63FF"/>
+                </a:solidFill>
+                <a:latin typeface="IBM Plex Mono" pitchFamily="34" charset="0"/>
+                <a:ea typeface="IBM Plex Mono" pitchFamily="34" charset="-122"/>
+                <a:cs typeface="IBM Plex Mono" pitchFamily="34" charset="-120"/>
+              </a:rPr>
+              <a:t>[2]</a:t>
+            </a:r>
+            <a:endParaRPr lang="en-US" sz="1500" dirty="0"/>
+          </a:p>
+        </p:txBody>
+      </p:sp>
+      <p:sp>
+        <p:nvSpPr>
+          <p:cNvPr id="11" name="Shape 9"/>
+          <p:cNvSpPr/>
+          <p:nvPr/>
+        </p:nvSpPr>
+        <p:spPr>
+          <a:xfrm>
+            <a:off x="502920" y="3127248"/>
+            <a:ext cx="11155680" cy="1097280"/>
+          </a:xfrm>
+          <a:prstGeom prst="roundRect">
+            <a:avLst>
+              <a:gd name="adj" fmla="val 10000"/>
+            </a:avLst>
+          </a:prstGeom>
+          <a:solidFill>
+            <a:srgbClr val="FFFFFF"/>
+          </a:solidFill>
+          <a:ln w="15875">
+            <a:solidFill>
+              <a:srgbClr val="D9DEE7"/>
+            </a:solidFill>
+            <a:prstDash val="solid"/>
+          </a:ln>
+        </p:spPr>
+      </p:sp>
+      <p:sp>
+        <p:nvSpPr>
+          <p:cNvPr id="12" name="Text 10"/>
+          <p:cNvSpPr txBox="1"/>
+          <p:nvPr/>
+        </p:nvSpPr>
+        <p:spPr>
+          <a:xfrm>
+            <a:off x="914400" y="3236976"/>
+            <a:ext cx="9418320" cy="877824"/>
+          </a:xfrm>
+          <a:prstGeom prst="rect">
+            <a:avLst/>
+          </a:prstGeom>
+          <a:noFill/>
+          <a:ln/>
+        </p:spPr>
+        <p:txBody>
+          <a:bodyPr wrap="square" lIns="0" tIns="0" rIns="0" bIns="0" rtlCol="0" anchor="ctr"/>
+          <a:lstStyle/>
+          <a:p>
+            <a:pPr indent="0" marL="0">
+              <a:lnSpc>
+                <a:spcPct val="118000"/>
+              </a:lnSpc>
+              <a:buNone/>
+            </a:pPr>
+            <a:r>
+              <a:rPr lang="en-US" sz="1700" dirty="0">
+                <a:solidFill>
+                  <a:srgbClr val="101828"/>
+                </a:solidFill>
+                <a:latin typeface="IBM Plex Sans" pitchFamily="34" charset="0"/>
+                <a:ea typeface="IBM Plex Sans" pitchFamily="34" charset="-122"/>
+                <a:cs typeface="IBM Plex Sans" pitchFamily="34" charset="-120"/>
+              </a:rPr>
+              <a:t>Explain why most criminal cyberattacks happen.</a:t>
+            </a:r>
+            <a:endParaRPr lang="en-US" sz="1700" dirty="0"/>
+          </a:p>
+        </p:txBody>
+      </p:sp>
+      <p:sp>
+        <p:nvSpPr>
+          <p:cNvPr id="13" name="Shape 11"/>
+          <p:cNvSpPr/>
+          <p:nvPr/>
+        </p:nvSpPr>
+        <p:spPr>
+          <a:xfrm>
+            <a:off x="10515600" y="3429000"/>
+            <a:ext cx="868680" cy="493776"/>
+          </a:xfrm>
+          <a:prstGeom prst="roundRect">
+            <a:avLst>
+              <a:gd name="adj" fmla="val 18519"/>
+            </a:avLst>
+          </a:prstGeom>
+          <a:solidFill>
+            <a:srgbClr val="EEF2FB"/>
+          </a:solidFill>
+          <a:ln/>
+        </p:spPr>
+      </p:sp>
+      <p:sp>
+        <p:nvSpPr>
+          <p:cNvPr id="14" name="Text 12"/>
+          <p:cNvSpPr txBox="1"/>
+          <p:nvPr/>
+        </p:nvSpPr>
+        <p:spPr>
+          <a:xfrm>
+            <a:off x="10515600" y="3429000"/>
+            <a:ext cx="868680" cy="493776"/>
+          </a:xfrm>
+          <a:prstGeom prst="rect">
+            <a:avLst/>
+          </a:prstGeom>
+          <a:noFill/>
+          <a:ln/>
+        </p:spPr>
+        <p:txBody>
+          <a:bodyPr wrap="square" lIns="0" tIns="0" rIns="0" bIns="0" rtlCol="0" anchor="ctr"/>
+          <a:lstStyle/>
+          <a:p>
+            <a:pPr algn="ctr" indent="0" marL="0">
+              <a:buNone/>
+            </a:pPr>
+            <a:r>
+              <a:rPr lang="en-US" sz="1500" b="1" dirty="0">
+                <a:solidFill>
+                  <a:srgbClr val="2D63FF"/>
+                </a:solidFill>
+                <a:latin typeface="IBM Plex Mono" pitchFamily="34" charset="0"/>
+                <a:ea typeface="IBM Plex Mono" pitchFamily="34" charset="-122"/>
+                <a:cs typeface="IBM Plex Mono" pitchFamily="34" charset="-120"/>
+              </a:rPr>
+              <a:t>[2]</a:t>
+            </a:r>
+            <a:endParaRPr lang="en-US" sz="1500" dirty="0"/>
+          </a:p>
+        </p:txBody>
+      </p:sp>
+      <p:sp>
+        <p:nvSpPr>
+          <p:cNvPr id="15" name="Shape 13"/>
+          <p:cNvSpPr/>
+          <p:nvPr/>
+        </p:nvSpPr>
+        <p:spPr>
+          <a:xfrm>
+            <a:off x="502920" y="4425696"/>
+            <a:ext cx="11155680" cy="1097280"/>
+          </a:xfrm>
+          <a:prstGeom prst="roundRect">
+            <a:avLst>
+              <a:gd name="adj" fmla="val 10000"/>
+            </a:avLst>
+          </a:prstGeom>
+          <a:solidFill>
+            <a:srgbClr val="FFFFFF"/>
+          </a:solidFill>
+          <a:ln w="15875">
+            <a:solidFill>
+              <a:srgbClr val="D9DEE7"/>
+            </a:solidFill>
+            <a:prstDash val="solid"/>
+          </a:ln>
+        </p:spPr>
+      </p:sp>
+      <p:sp>
+        <p:nvSpPr>
+          <p:cNvPr id="16" name="Text 14"/>
+          <p:cNvSpPr txBox="1"/>
+          <p:nvPr/>
+        </p:nvSpPr>
+        <p:spPr>
+          <a:xfrm>
+            <a:off x="914400" y="4535424"/>
+            <a:ext cx="9418320" cy="877824"/>
+          </a:xfrm>
+          <a:prstGeom prst="rect">
+            <a:avLst/>
+          </a:prstGeom>
+          <a:noFill/>
+          <a:ln/>
+        </p:spPr>
+        <p:txBody>
+          <a:bodyPr wrap="square" lIns="0" tIns="0" rIns="0" bIns="0" rtlCol="0" anchor="ctr"/>
+          <a:lstStyle/>
+          <a:p>
+            <a:pPr indent="0" marL="0">
+              <a:lnSpc>
+                <a:spcPct val="118000"/>
+              </a:lnSpc>
+              <a:buNone/>
+            </a:pPr>
+            <a:r>
+              <a:rPr lang="en-US" sz="1700" dirty="0">
+                <a:solidFill>
+                  <a:srgbClr val="101828"/>
+                </a:solidFill>
+                <a:latin typeface="IBM Plex Sans" pitchFamily="34" charset="0"/>
+                <a:ea typeface="IBM Plex Sans" pitchFamily="34" charset="-122"/>
+                <a:cs typeface="IBM Plex Sans" pitchFamily="34" charset="-120"/>
+              </a:rPr>
+              <a:t>A small business is hit by ransomware. Describe three costs it will face beyond the ransom itself.</a:t>
+            </a:r>
+            <a:endParaRPr lang="en-US" sz="1700" dirty="0"/>
+          </a:p>
+        </p:txBody>
+      </p:sp>
+      <p:sp>
+        <p:nvSpPr>
+          <p:cNvPr id="17" name="Shape 15"/>
+          <p:cNvSpPr/>
+          <p:nvPr/>
+        </p:nvSpPr>
+        <p:spPr>
+          <a:xfrm>
+            <a:off x="10515600" y="4727448"/>
+            <a:ext cx="868680" cy="493776"/>
+          </a:xfrm>
+          <a:prstGeom prst="roundRect">
+            <a:avLst>
+              <a:gd name="adj" fmla="val 18519"/>
+            </a:avLst>
+          </a:prstGeom>
+          <a:solidFill>
+            <a:srgbClr val="EEF2FB"/>
+          </a:solidFill>
+          <a:ln/>
+        </p:spPr>
+      </p:sp>
+      <p:sp>
+        <p:nvSpPr>
+          <p:cNvPr id="18" name="Text 16"/>
+          <p:cNvSpPr txBox="1"/>
+          <p:nvPr/>
+        </p:nvSpPr>
+        <p:spPr>
+          <a:xfrm>
+            <a:off x="10515600" y="4727448"/>
+            <a:ext cx="868680" cy="493776"/>
+          </a:xfrm>
+          <a:prstGeom prst="rect">
+            <a:avLst/>
+          </a:prstGeom>
+          <a:noFill/>
+          <a:ln/>
+        </p:spPr>
+        <p:txBody>
+          <a:bodyPr wrap="square" lIns="0" tIns="0" rIns="0" bIns="0" rtlCol="0" anchor="ctr"/>
+          <a:lstStyle/>
+          <a:p>
+            <a:pPr algn="ctr" indent="0" marL="0">
+              <a:buNone/>
+            </a:pPr>
+            <a:r>
+              <a:rPr lang="en-US" sz="1500" b="1" dirty="0">
+                <a:solidFill>
+                  <a:srgbClr val="2D63FF"/>
+                </a:solidFill>
+                <a:latin typeface="IBM Plex Mono" pitchFamily="34" charset="0"/>
+                <a:ea typeface="IBM Plex Mono" pitchFamily="34" charset="-122"/>
+                <a:cs typeface="IBM Plex Mono" pitchFamily="34" charset="-120"/>
+              </a:rPr>
+              <a:t>[6]</a:t>
+            </a:r>
+            <a:endParaRPr lang="en-US" sz="1500" dirty="0"/>
+          </a:p>
+        </p:txBody>
+      </p:sp>
+    </p:spTree>
+  </p:cSld>
+  <p:clrMapOvr>
+    <a:masterClrMapping/>
+  </p:clrMapOvr>
+</p:sld>
+</file>
+
+<file path=ppt/slides/slide15.xml><?xml version="1.0" encoding="utf-8"?>
+<p:sld xmlns:a="http://schemas.openxmlformats.org/drawingml/2006/main" xmlns:r="http://schemas.openxmlformats.org/officeDocument/2006/relationships" xmlns:p="http://schemas.openxmlformats.org/presentationml/2006/main">
+  <p:cSld name="Slide 15">
     <p:bg>
       <p:bgPr>
         <a:solidFill>
